--- a/courses/ooad/sessions/s13.pptx
+++ b/courses/ooad/sessions/s13.pptx
@@ -418,7 +418,7 @@
   </p:cSld>
   <p:clrMap bg1="lt1" tx1="dk1" bg2="lt2" tx2="dk2" accent1="accent1" accent2="accent2" accent3="accent3" accent4="accent4" accent5="accent5" accent6="accent6" hlink="hlink" folHlink="folHlink"/>
   <p:notesStyle>
-    <a:lvl1pPr marL="0" algn="l" defTabSz="914400" rtl="0" eaLnBrk="1" latinLnBrk="1" hangingPunct="1">
+    <a:lvl1pPr marL="0" algn="l" defTabSz="914400" rtl="0" eaLnBrk="1" latinLnBrk="0" hangingPunct="1">
       <a:defRPr sz="1200" kern="1200">
         <a:solidFill>
           <a:schemeClr val="tx1"/>
@@ -428,7 +428,7 @@
         <a:cs typeface="+mn-cs"/>
       </a:defRPr>
     </a:lvl1pPr>
-    <a:lvl2pPr marL="457200" algn="l" defTabSz="914400" rtl="0" eaLnBrk="1" latinLnBrk="1" hangingPunct="1">
+    <a:lvl2pPr marL="457200" algn="l" defTabSz="914400" rtl="0" eaLnBrk="1" latinLnBrk="0" hangingPunct="1">
       <a:defRPr sz="1200" kern="1200">
         <a:solidFill>
           <a:schemeClr val="tx1"/>
@@ -438,7 +438,7 @@
         <a:cs typeface="+mn-cs"/>
       </a:defRPr>
     </a:lvl2pPr>
-    <a:lvl3pPr marL="914400" algn="l" defTabSz="914400" rtl="0" eaLnBrk="1" latinLnBrk="1" hangingPunct="1">
+    <a:lvl3pPr marL="914400" algn="l" defTabSz="914400" rtl="0" eaLnBrk="1" latinLnBrk="0" hangingPunct="1">
       <a:defRPr sz="1200" kern="1200">
         <a:solidFill>
           <a:schemeClr val="tx1"/>
@@ -448,7 +448,7 @@
         <a:cs typeface="+mn-cs"/>
       </a:defRPr>
     </a:lvl3pPr>
-    <a:lvl4pPr marL="1371600" algn="l" defTabSz="914400" rtl="0" eaLnBrk="1" latinLnBrk="1" hangingPunct="1">
+    <a:lvl4pPr marL="1371600" algn="l" defTabSz="914400" rtl="0" eaLnBrk="1" latinLnBrk="0" hangingPunct="1">
       <a:defRPr sz="1200" kern="1200">
         <a:solidFill>
           <a:schemeClr val="tx1"/>
@@ -458,7 +458,7 @@
         <a:cs typeface="+mn-cs"/>
       </a:defRPr>
     </a:lvl4pPr>
-    <a:lvl5pPr marL="1828800" algn="l" defTabSz="914400" rtl="0" eaLnBrk="1" latinLnBrk="1" hangingPunct="1">
+    <a:lvl5pPr marL="1828800" algn="l" defTabSz="914400" rtl="0" eaLnBrk="1" latinLnBrk="0" hangingPunct="1">
       <a:defRPr sz="1200" kern="1200">
         <a:solidFill>
           <a:schemeClr val="tx1"/>
@@ -468,7 +468,7 @@
         <a:cs typeface="+mn-cs"/>
       </a:defRPr>
     </a:lvl5pPr>
-    <a:lvl6pPr marL="2286000" algn="l" defTabSz="914400" rtl="0" eaLnBrk="1" latinLnBrk="1" hangingPunct="1">
+    <a:lvl6pPr marL="2286000" algn="l" defTabSz="914400" rtl="0" eaLnBrk="1" latinLnBrk="0" hangingPunct="1">
       <a:defRPr sz="1200" kern="1200">
         <a:solidFill>
           <a:schemeClr val="tx1"/>
@@ -478,7 +478,7 @@
         <a:cs typeface="+mn-cs"/>
       </a:defRPr>
     </a:lvl6pPr>
-    <a:lvl7pPr marL="2743200" algn="l" defTabSz="914400" rtl="0" eaLnBrk="1" latinLnBrk="1" hangingPunct="1">
+    <a:lvl7pPr marL="2743200" algn="l" defTabSz="914400" rtl="0" eaLnBrk="1" latinLnBrk="0" hangingPunct="1">
       <a:defRPr sz="1200" kern="1200">
         <a:solidFill>
           <a:schemeClr val="tx1"/>
@@ -488,7 +488,7 @@
         <a:cs typeface="+mn-cs"/>
       </a:defRPr>
     </a:lvl7pPr>
-    <a:lvl8pPr marL="3200400" algn="l" defTabSz="914400" rtl="0" eaLnBrk="1" latinLnBrk="1" hangingPunct="1">
+    <a:lvl8pPr marL="3200400" algn="l" defTabSz="914400" rtl="0" eaLnBrk="1" latinLnBrk="0" hangingPunct="1">
       <a:defRPr sz="1200" kern="1200">
         <a:solidFill>
           <a:schemeClr val="tx1"/>
@@ -498,7 +498,7 @@
         <a:cs typeface="+mn-cs"/>
       </a:defRPr>
     </a:lvl8pPr>
-    <a:lvl9pPr marL="3657600" algn="l" defTabSz="914400" rtl="0" eaLnBrk="1" latinLnBrk="1" hangingPunct="1">
+    <a:lvl9pPr marL="3657600" algn="l" defTabSz="914400" rtl="0" eaLnBrk="1" latinLnBrk="0" hangingPunct="1">
       <a:defRPr sz="1200" kern="1200">
         <a:solidFill>
           <a:schemeClr val="tx1"/>
@@ -3147,7 +3147,7 @@
   <p:hf hdr="0" ftr="0" dt="0"/>
   <p:txStyles>
     <p:titleStyle>
-      <a:lvl1pPr algn="l" rtl="0" eaLnBrk="0" fontAlgn="base" latinLnBrk="1" hangingPunct="0">
+      <a:lvl1pPr algn="l" rtl="0" eaLnBrk="0" fontAlgn="base" latinLnBrk="0" hangingPunct="0">
         <a:spcBef>
           <a:spcPct val="0"/>
         </a:spcBef>
@@ -3163,7 +3163,7 @@
           <a:cs typeface="+mj-cs"/>
         </a:defRPr>
       </a:lvl1pPr>
-      <a:lvl2pPr algn="l" rtl="0" eaLnBrk="0" fontAlgn="base" latinLnBrk="1" hangingPunct="0">
+      <a:lvl2pPr algn="l" rtl="0" eaLnBrk="0" fontAlgn="base" latinLnBrk="0" hangingPunct="0">
         <a:spcBef>
           <a:spcPct val="0"/>
         </a:spcBef>
@@ -3178,7 +3178,7 @@
           <a:ea typeface="맑은 고딕" pitchFamily="50" charset="-127"/>
         </a:defRPr>
       </a:lvl2pPr>
-      <a:lvl3pPr algn="l" rtl="0" eaLnBrk="0" fontAlgn="base" latinLnBrk="1" hangingPunct="0">
+      <a:lvl3pPr algn="l" rtl="0" eaLnBrk="0" fontAlgn="base" latinLnBrk="0" hangingPunct="0">
         <a:spcBef>
           <a:spcPct val="0"/>
         </a:spcBef>
@@ -3193,7 +3193,7 @@
           <a:ea typeface="맑은 고딕" pitchFamily="50" charset="-127"/>
         </a:defRPr>
       </a:lvl3pPr>
-      <a:lvl4pPr algn="l" rtl="0" eaLnBrk="0" fontAlgn="base" latinLnBrk="1" hangingPunct="0">
+      <a:lvl4pPr algn="l" rtl="0" eaLnBrk="0" fontAlgn="base" latinLnBrk="0" hangingPunct="0">
         <a:spcBef>
           <a:spcPct val="0"/>
         </a:spcBef>
@@ -3208,7 +3208,7 @@
           <a:ea typeface="맑은 고딕" pitchFamily="50" charset="-127"/>
         </a:defRPr>
       </a:lvl4pPr>
-      <a:lvl5pPr algn="l" rtl="0" eaLnBrk="0" fontAlgn="base" latinLnBrk="1" hangingPunct="0">
+      <a:lvl5pPr algn="l" rtl="0" eaLnBrk="0" fontAlgn="base" latinLnBrk="0" hangingPunct="0">
         <a:spcBef>
           <a:spcPct val="0"/>
         </a:spcBef>
@@ -3223,7 +3223,7 @@
           <a:ea typeface="맑은 고딕" pitchFamily="50" charset="-127"/>
         </a:defRPr>
       </a:lvl5pPr>
-      <a:lvl6pPr marL="457200" algn="ctr" rtl="0" fontAlgn="base" latinLnBrk="1">
+      <a:lvl6pPr marL="457200" algn="ctr" rtl="0" fontAlgn="base" latinLnBrk="0">
         <a:spcBef>
           <a:spcPct val="0"/>
         </a:spcBef>
@@ -3238,7 +3238,7 @@
           <a:ea typeface="맑은 고딕" pitchFamily="50" charset="-127"/>
         </a:defRPr>
       </a:lvl6pPr>
-      <a:lvl7pPr marL="914400" algn="ctr" rtl="0" fontAlgn="base" latinLnBrk="1">
+      <a:lvl7pPr marL="914400" algn="ctr" rtl="0" fontAlgn="base" latinLnBrk="0">
         <a:spcBef>
           <a:spcPct val="0"/>
         </a:spcBef>
@@ -3253,7 +3253,7 @@
           <a:ea typeface="맑은 고딕" pitchFamily="50" charset="-127"/>
         </a:defRPr>
       </a:lvl7pPr>
-      <a:lvl8pPr marL="1371600" algn="ctr" rtl="0" fontAlgn="base" latinLnBrk="1">
+      <a:lvl8pPr marL="1371600" algn="ctr" rtl="0" fontAlgn="base" latinLnBrk="0">
         <a:spcBef>
           <a:spcPct val="0"/>
         </a:spcBef>
@@ -3268,7 +3268,7 @@
           <a:ea typeface="맑은 고딕" pitchFamily="50" charset="-127"/>
         </a:defRPr>
       </a:lvl8pPr>
-      <a:lvl9pPr marL="1828800" algn="ctr" rtl="0" fontAlgn="base" latinLnBrk="1">
+      <a:lvl9pPr marL="1828800" algn="ctr" rtl="0" fontAlgn="base" latinLnBrk="0">
         <a:spcBef>
           <a:spcPct val="0"/>
         </a:spcBef>
@@ -3285,7 +3285,7 @@
       </a:lvl9pPr>
     </p:titleStyle>
     <p:bodyStyle>
-      <a:lvl1pPr marL="342900" indent="-342900" algn="l" rtl="0" eaLnBrk="0" fontAlgn="base" latinLnBrk="1" hangingPunct="0">
+      <a:lvl1pPr marL="342900" indent="-342900" algn="l" rtl="0" eaLnBrk="0" fontAlgn="base" latinLnBrk="0" hangingPunct="0">
         <a:spcBef>
           <a:spcPct val="20000"/>
         </a:spcBef>
@@ -3303,7 +3303,7 @@
           <a:cs typeface="+mn-cs"/>
         </a:defRPr>
       </a:lvl1pPr>
-      <a:lvl2pPr marL="742950" indent="-285750" algn="l" rtl="0" eaLnBrk="0" fontAlgn="base" latinLnBrk="1" hangingPunct="0">
+      <a:lvl2pPr marL="742950" indent="-285750" algn="l" rtl="0" eaLnBrk="0" fontAlgn="base" latinLnBrk="0" hangingPunct="0">
         <a:spcBef>
           <a:spcPct val="20000"/>
         </a:spcBef>
@@ -3321,7 +3321,7 @@
           <a:cs typeface="+mn-cs"/>
         </a:defRPr>
       </a:lvl2pPr>
-      <a:lvl3pPr marL="1143000" indent="-228600" algn="l" rtl="0" eaLnBrk="0" fontAlgn="base" latinLnBrk="1" hangingPunct="0">
+      <a:lvl3pPr marL="1143000" indent="-228600" algn="l" rtl="0" eaLnBrk="0" fontAlgn="base" latinLnBrk="0" hangingPunct="0">
         <a:spcBef>
           <a:spcPct val="20000"/>
         </a:spcBef>
@@ -3339,7 +3339,7 @@
           <a:cs typeface="+mn-cs"/>
         </a:defRPr>
       </a:lvl3pPr>
-      <a:lvl4pPr marL="1600200" indent="-228600" algn="l" rtl="0" eaLnBrk="0" fontAlgn="base" latinLnBrk="1" hangingPunct="0">
+      <a:lvl4pPr marL="1600200" indent="-228600" algn="l" rtl="0" eaLnBrk="0" fontAlgn="base" latinLnBrk="0" hangingPunct="0">
         <a:spcBef>
           <a:spcPct val="20000"/>
         </a:spcBef>
@@ -3357,7 +3357,7 @@
           <a:cs typeface="+mn-cs"/>
         </a:defRPr>
       </a:lvl4pPr>
-      <a:lvl5pPr marL="2057400" indent="-228600" algn="l" rtl="0" eaLnBrk="0" fontAlgn="base" latinLnBrk="1" hangingPunct="0">
+      <a:lvl5pPr marL="2057400" indent="-228600" algn="l" rtl="0" eaLnBrk="0" fontAlgn="base" latinLnBrk="0" hangingPunct="0">
         <a:spcBef>
           <a:spcPct val="20000"/>
         </a:spcBef>
@@ -3375,7 +3375,7 @@
           <a:cs typeface="+mn-cs"/>
         </a:defRPr>
       </a:lvl5pPr>
-      <a:lvl6pPr marL="2514600" indent="-228600" algn="l" defTabSz="914400" rtl="0" eaLnBrk="1" latinLnBrk="1" hangingPunct="1">
+      <a:lvl6pPr marL="2514600" indent="-228600" algn="l" defTabSz="914400" rtl="0" eaLnBrk="1" latinLnBrk="0" hangingPunct="1">
         <a:spcBef>
           <a:spcPct val="20000"/>
         </a:spcBef>
@@ -3390,7 +3390,7 @@
           <a:cs typeface="+mn-cs"/>
         </a:defRPr>
       </a:lvl6pPr>
-      <a:lvl7pPr marL="2971800" indent="-228600" algn="l" defTabSz="914400" rtl="0" eaLnBrk="1" latinLnBrk="1" hangingPunct="1">
+      <a:lvl7pPr marL="2971800" indent="-228600" algn="l" defTabSz="914400" rtl="0" eaLnBrk="1" latinLnBrk="0" hangingPunct="1">
         <a:spcBef>
           <a:spcPct val="20000"/>
         </a:spcBef>
@@ -3405,7 +3405,7 @@
           <a:cs typeface="+mn-cs"/>
         </a:defRPr>
       </a:lvl7pPr>
-      <a:lvl8pPr marL="3429000" indent="-228600" algn="l" defTabSz="914400" rtl="0" eaLnBrk="1" latinLnBrk="1" hangingPunct="1">
+      <a:lvl8pPr marL="3429000" indent="-228600" algn="l" defTabSz="914400" rtl="0" eaLnBrk="1" latinLnBrk="0" hangingPunct="1">
         <a:spcBef>
           <a:spcPct val="20000"/>
         </a:spcBef>
@@ -3420,7 +3420,7 @@
           <a:cs typeface="+mn-cs"/>
         </a:defRPr>
       </a:lvl8pPr>
-      <a:lvl9pPr marL="3886200" indent="-228600" algn="l" defTabSz="914400" rtl="0" eaLnBrk="1" latinLnBrk="1" hangingPunct="1">
+      <a:lvl9pPr marL="3886200" indent="-228600" algn="l" defTabSz="914400" rtl="0" eaLnBrk="1" latinLnBrk="0" hangingPunct="1">
         <a:spcBef>
           <a:spcPct val="20000"/>
         </a:spcBef>
@@ -3440,7 +3440,7 @@
       <a:defPPr>
         <a:defRPr lang="ko-KR"/>
       </a:defPPr>
-      <a:lvl1pPr marL="0" algn="l" defTabSz="914400" rtl="0" eaLnBrk="1" latinLnBrk="1" hangingPunct="1">
+      <a:lvl1pPr marL="0" algn="l" defTabSz="914400" rtl="0" eaLnBrk="1" latinLnBrk="0" hangingPunct="1">
         <a:defRPr sz="1800" kern="1200">
           <a:solidFill>
             <a:schemeClr val="tx1"/>
@@ -3450,7 +3450,7 @@
           <a:cs typeface="+mn-cs"/>
         </a:defRPr>
       </a:lvl1pPr>
-      <a:lvl2pPr marL="457200" algn="l" defTabSz="914400" rtl="0" eaLnBrk="1" latinLnBrk="1" hangingPunct="1">
+      <a:lvl2pPr marL="457200" algn="l" defTabSz="914400" rtl="0" eaLnBrk="1" latinLnBrk="0" hangingPunct="1">
         <a:defRPr sz="1800" kern="1200">
           <a:solidFill>
             <a:schemeClr val="tx1"/>
@@ -3460,7 +3460,7 @@
           <a:cs typeface="+mn-cs"/>
         </a:defRPr>
       </a:lvl2pPr>
-      <a:lvl3pPr marL="914400" algn="l" defTabSz="914400" rtl="0" eaLnBrk="1" latinLnBrk="1" hangingPunct="1">
+      <a:lvl3pPr marL="914400" algn="l" defTabSz="914400" rtl="0" eaLnBrk="1" latinLnBrk="0" hangingPunct="1">
         <a:defRPr sz="1800" kern="1200">
           <a:solidFill>
             <a:schemeClr val="tx1"/>
@@ -3470,7 +3470,7 @@
           <a:cs typeface="+mn-cs"/>
         </a:defRPr>
       </a:lvl3pPr>
-      <a:lvl4pPr marL="1371600" algn="l" defTabSz="914400" rtl="0" eaLnBrk="1" latinLnBrk="1" hangingPunct="1">
+      <a:lvl4pPr marL="1371600" algn="l" defTabSz="914400" rtl="0" eaLnBrk="1" latinLnBrk="0" hangingPunct="1">
         <a:defRPr sz="1800" kern="1200">
           <a:solidFill>
             <a:schemeClr val="tx1"/>
@@ -3480,7 +3480,7 @@
           <a:cs typeface="+mn-cs"/>
         </a:defRPr>
       </a:lvl4pPr>
-      <a:lvl5pPr marL="1828800" algn="l" defTabSz="914400" rtl="0" eaLnBrk="1" latinLnBrk="1" hangingPunct="1">
+      <a:lvl5pPr marL="1828800" algn="l" defTabSz="914400" rtl="0" eaLnBrk="1" latinLnBrk="0" hangingPunct="1">
         <a:defRPr sz="1800" kern="1200">
           <a:solidFill>
             <a:schemeClr val="tx1"/>
@@ -3490,7 +3490,7 @@
           <a:cs typeface="+mn-cs"/>
         </a:defRPr>
       </a:lvl5pPr>
-      <a:lvl6pPr marL="2286000" algn="l" defTabSz="914400" rtl="0" eaLnBrk="1" latinLnBrk="1" hangingPunct="1">
+      <a:lvl6pPr marL="2286000" algn="l" defTabSz="914400" rtl="0" eaLnBrk="1" latinLnBrk="0" hangingPunct="1">
         <a:defRPr sz="1800" kern="1200">
           <a:solidFill>
             <a:schemeClr val="tx1"/>
@@ -3500,7 +3500,7 @@
           <a:cs typeface="+mn-cs"/>
         </a:defRPr>
       </a:lvl6pPr>
-      <a:lvl7pPr marL="2743200" algn="l" defTabSz="914400" rtl="0" eaLnBrk="1" latinLnBrk="1" hangingPunct="1">
+      <a:lvl7pPr marL="2743200" algn="l" defTabSz="914400" rtl="0" eaLnBrk="1" latinLnBrk="0" hangingPunct="1">
         <a:defRPr sz="1800" kern="1200">
           <a:solidFill>
             <a:schemeClr val="tx1"/>
@@ -3510,7 +3510,7 @@
           <a:cs typeface="+mn-cs"/>
         </a:defRPr>
       </a:lvl7pPr>
-      <a:lvl8pPr marL="3200400" algn="l" defTabSz="914400" rtl="0" eaLnBrk="1" latinLnBrk="1" hangingPunct="1">
+      <a:lvl8pPr marL="3200400" algn="l" defTabSz="914400" rtl="0" eaLnBrk="1" latinLnBrk="0" hangingPunct="1">
         <a:defRPr sz="1800" kern="1200">
           <a:solidFill>
             <a:schemeClr val="tx1"/>
@@ -3520,7 +3520,7 @@
           <a:cs typeface="+mn-cs"/>
         </a:defRPr>
       </a:lvl8pPr>
-      <a:lvl9pPr marL="3657600" algn="l" defTabSz="914400" rtl="0" eaLnBrk="1" latinLnBrk="1" hangingPunct="1">
+      <a:lvl9pPr marL="3657600" algn="l" defTabSz="914400" rtl="0" eaLnBrk="1" latinLnBrk="0" hangingPunct="1">
         <a:defRPr sz="1800" kern="1200">
           <a:solidFill>
             <a:schemeClr val="tx1"/>
@@ -6631,7 +6631,7 @@
                 <a:latin typeface="맑은 고딕"/>
                 <a:ea typeface="맑은 고딕"/>
               </a:rPr>
-              <a:t>Eric Evans, 2015</a:t>
+              <a:t>[Evans 2015]</a:t>
             </a:r>
           </a:p>
         </p:txBody>
@@ -8169,7 +8169,7 @@
                 <a:latin typeface="맑은 고딕"/>
                 <a:ea typeface="맑은 고딕"/>
               </a:rPr>
-              <a:t>Eric Evans, 2015</a:t>
+              <a:t>[Evans 2015]</a:t>
             </a:r>
           </a:p>
         </p:txBody>
@@ -9570,7 +9570,7 @@
                 <a:latin typeface="맑은 고딕"/>
                 <a:ea typeface="맑은 고딕"/>
               </a:rPr>
-              <a:t>Eric Evans, 2015</a:t>
+              <a:t>[Evans 2015]</a:t>
             </a:r>
           </a:p>
         </p:txBody>
@@ -12228,7 +12228,7 @@
                 <a:latin typeface="맑은 고딕"/>
                 <a:ea typeface="맑은 고딕"/>
               </a:rPr>
-              <a:t>James Lewis·Martin Fowler, 2014</a:t>
+              <a:t>[Lewis·Fowler 2014]</a:t>
             </a:r>
           </a:p>
         </p:txBody>
@@ -13439,7 +13439,7 @@
                 <a:latin typeface="맑은 고딕"/>
                 <a:ea typeface="맑은 고딕"/>
               </a:rPr>
-              <a:t>Martin Fowler, 2014</a:t>
+              <a:t>[Fowler 2014]</a:t>
             </a:r>
           </a:p>
         </p:txBody>
@@ -15014,7 +15014,7 @@
                 <a:latin typeface="맑은 고딕"/>
                 <a:ea typeface="맑은 고딕"/>
               </a:rPr>
-              <a:t>Martin Fowler, 2015</a:t>
+              <a:t>[Fowler 2015c]</a:t>
             </a:r>
           </a:p>
         </p:txBody>
@@ -16349,7 +16349,7 @@
                 <a:latin typeface="맑은 고딕"/>
                 <a:ea typeface="맑은 고딕"/>
               </a:rPr>
-              <a:t>Melvin E. Conway, 1968</a:t>
+              <a:t>[Conway 1968]</a:t>
             </a:r>
           </a:p>
         </p:txBody>
@@ -17952,7 +17952,7 @@
                 <a:latin typeface="맑은 고딕"/>
                 <a:ea typeface="맑은 고딕"/>
               </a:rPr>
-              <a:t>Martin Fowler, 2015</a:t>
+              <a:t>[Fowler 2015d]</a:t>
             </a:r>
           </a:p>
           <a:p>
@@ -18048,7 +18048,7 @@
                 <a:latin typeface="맑은 고딕"/>
                 <a:ea typeface="맑은 고딕"/>
               </a:rPr>
-              <a:t>(「18」)</a:t>
+              <a:t>(「18. 경계는 처음에 맞히기 어렵다」)</a:t>
             </a:r>
             <a:r>
               <a:rPr sz="1600" b="0">
@@ -18422,7 +18422,7 @@
                 <a:latin typeface="맑은 고딕"/>
                 <a:ea typeface="맑은 고딕"/>
               </a:rPr>
-              <a:t>(「10」)</a:t>
+              <a:t>(「10. 맥락 안의 모델」)</a:t>
             </a:r>
             <a:r>
               <a:rPr sz="1600" b="0">
@@ -18462,7 +18462,7 @@
                 <a:latin typeface="맑은 고딕"/>
                 <a:ea typeface="맑은 고딕"/>
               </a:rPr>
-              <a:t>(「11」)</a:t>
+              <a:t>(「11. 맥락 지도」)</a:t>
             </a:r>
             <a:r>
               <a:rPr sz="1600" b="0">
@@ -18836,7 +18836,7 @@
                 <a:latin typeface="맑은 고딕"/>
                 <a:ea typeface="맑은 고딕"/>
               </a:rPr>
-              <a:t>(「03」)</a:t>
+              <a:t>(「03. OOAD가 넘기는 것」)</a:t>
             </a:r>
             <a:r>
               <a:rPr sz="1600" b="0">
@@ -24357,7 +24357,7 @@
                 <a:latin typeface="맑은 고딕"/>
                 <a:ea typeface="맑은 고딕"/>
               </a:rPr>
-              <a:t>Martin Fowler, 2003</a:t>
+              <a:t>[Fowler 2003c]</a:t>
             </a:r>
           </a:p>
         </p:txBody>
@@ -24746,6 +24746,27 @@
             </a:r>
           </a:p>
           <a:p>
+            <a:pPr marL="342900" indent="0">
+              <a:spcBef>
+                <a:spcPts val="600"/>
+              </a:spcBef>
+              <a:spcAft>
+                <a:spcPts val="600"/>
+              </a:spcAft>
+              <a:buNone/>
+            </a:pPr>
+            <a:r>
+              <a:rPr sz="1800" b="1">
+                <a:solidFill>
+                  <a:srgbClr val="000000"/>
+                </a:solidFill>
+                <a:latin typeface="맑은 고딕"/>
+                <a:ea typeface="맑은 고딕"/>
+              </a:rPr>
+              <a:t>OOAD에서 전문영역으로의 핵심</a:t>
+            </a:r>
+          </a:p>
+          <a:p>
             <a:pPr lvl="2" marL="723900" indent="-368300">
               <a:spcBef>
                 <a:spcPts val="600"/>
@@ -24758,6 +24779,16 @@
               <a:buChar char=""/>
             </a:pPr>
             <a:r>
+              <a:rPr sz="1800" b="1">
+                <a:solidFill>
+                  <a:srgbClr val="000000"/>
+                </a:solidFill>
+                <a:latin typeface="맑은 고딕"/>
+                <a:ea typeface="맑은 고딕"/>
+              </a:rPr>
+              <a:t>원칙</a:t>
+            </a:r>
+            <a:r>
               <a:rPr sz="1800" b="0">
                 <a:solidFill>
                   <a:srgbClr val="000000"/>
@@ -24765,30 +24796,7 @@
                 <a:latin typeface="맑은 고딕"/>
                 <a:ea typeface="맑은 고딕"/>
               </a:rPr>
-              <a:t>OOAD에서 전문영역으로의 핵심</a:t>
-            </a:r>
-          </a:p>
-          <a:p>
-            <a:pPr lvl="3" marL="1077913" indent="-354013">
-              <a:spcBef>
-                <a:spcPts val="600"/>
-              </a:spcBef>
-              <a:spcAft>
-                <a:spcPts val="600"/>
-              </a:spcAft>
-              <a:buSzPct val="90000"/>
-              <a:buFont typeface="Wingdings" pitchFamily="2" charset="2"/>
-              <a:buChar char=""/>
-            </a:pPr>
-            <a:r>
-              <a:rPr sz="1600" b="1">
-                <a:solidFill>
-                  <a:srgbClr val="000000"/>
-                </a:solidFill>
-                <a:latin typeface="맑은 고딕"/>
-                <a:ea typeface="맑은 고딕"/>
-              </a:rPr>
-              <a:t>원칙</a:t>
+              <a:t> —</a:t>
             </a:r>
             <a:r>
               <a:rPr sz="1600" b="0">
@@ -24798,189 +24806,7 @@
                 <a:latin typeface="맑은 고딕"/>
                 <a:ea typeface="맑은 고딕"/>
               </a:rPr>
-              <a:t> —</a:t>
-            </a:r>
-            <a:r>
-              <a:rPr sz="1400" b="0">
-                <a:solidFill>
-                  <a:srgbClr val="000000"/>
-                </a:solidFill>
-                <a:latin typeface="맑은 고딕"/>
-                <a:ea typeface="맑은 고딕"/>
-              </a:rPr>
               <a:t> OOAD는 전문영역을 대체하지 않고, 문제 이해와 설계 판단의 공통 기반이다</a:t>
-            </a:r>
-          </a:p>
-          <a:p>
-            <a:pPr lvl="3" marL="1077913" indent="-354013">
-              <a:spcBef>
-                <a:spcPts val="600"/>
-              </a:spcBef>
-              <a:spcAft>
-                <a:spcPts val="600"/>
-              </a:spcAft>
-              <a:buSzPct val="90000"/>
-              <a:buFont typeface="Wingdings" pitchFamily="2" charset="2"/>
-              <a:buChar char=""/>
-            </a:pPr>
-            <a:r>
-              <a:rPr sz="1600" b="1">
-                <a:solidFill>
-                  <a:srgbClr val="000000"/>
-                </a:solidFill>
-                <a:latin typeface="맑은 고딕"/>
-                <a:ea typeface="맑은 고딕"/>
-              </a:rPr>
-              <a:t>Architecture</a:t>
-            </a:r>
-            <a:r>
-              <a:rPr sz="1600" b="0">
-                <a:solidFill>
-                  <a:srgbClr val="000000"/>
-                </a:solidFill>
-                <a:latin typeface="맑은 고딕"/>
-                <a:ea typeface="맑은 고딕"/>
-              </a:rPr>
-              <a:t> —</a:t>
-            </a:r>
-            <a:r>
-              <a:rPr sz="1400" b="0">
-                <a:solidFill>
-                  <a:srgbClr val="000000"/>
-                </a:solidFill>
-                <a:latin typeface="맑은 고딕"/>
-                <a:ea typeface="맑은 고딕"/>
-              </a:rPr>
-              <a:t> 품질 속성 시나리오와 시스템 수준의 절충, 바꾸기 어려운 결정</a:t>
-            </a:r>
-          </a:p>
-          <a:p>
-            <a:pPr lvl="3" marL="1077913" indent="-354013">
-              <a:spcBef>
-                <a:spcPts val="600"/>
-              </a:spcBef>
-              <a:spcAft>
-                <a:spcPts val="600"/>
-              </a:spcAft>
-              <a:buSzPct val="90000"/>
-              <a:buFont typeface="Wingdings" pitchFamily="2" charset="2"/>
-              <a:buChar char=""/>
-            </a:pPr>
-            <a:r>
-              <a:rPr sz="1600" b="1">
-                <a:solidFill>
-                  <a:srgbClr val="000000"/>
-                </a:solidFill>
-                <a:latin typeface="맑은 고딕"/>
-                <a:ea typeface="맑은 고딕"/>
-              </a:rPr>
-              <a:t>DDD</a:t>
-            </a:r>
-            <a:r>
-              <a:rPr sz="1600" b="0">
-                <a:solidFill>
-                  <a:srgbClr val="000000"/>
-                </a:solidFill>
-                <a:latin typeface="맑은 고딕"/>
-                <a:ea typeface="맑은 고딕"/>
-              </a:rPr>
-              <a:t> —</a:t>
-            </a:r>
-            <a:r>
-              <a:rPr sz="1400" b="0">
-                <a:solidFill>
-                  <a:srgbClr val="000000"/>
-                </a:solidFill>
-                <a:latin typeface="맑은 고딕"/>
-                <a:ea typeface="맑은 고딕"/>
-              </a:rPr>
-              <a:t> 맥락 안의 모델, 공통 언어의 정제, 핵심 도메인</a:t>
-            </a:r>
-          </a:p>
-          <a:p>
-            <a:pPr lvl="3" marL="1077913" indent="-354013">
-              <a:spcBef>
-                <a:spcPts val="600"/>
-              </a:spcBef>
-              <a:spcAft>
-                <a:spcPts val="600"/>
-              </a:spcAft>
-              <a:buSzPct val="90000"/>
-              <a:buFont typeface="Wingdings" pitchFamily="2" charset="2"/>
-              <a:buChar char=""/>
-            </a:pPr>
-            <a:r>
-              <a:rPr sz="1600" b="1">
-                <a:solidFill>
-                  <a:srgbClr val="000000"/>
-                </a:solidFill>
-                <a:latin typeface="맑은 고딕"/>
-                <a:ea typeface="맑은 고딕"/>
-              </a:rPr>
-              <a:t>MSA</a:t>
-            </a:r>
-            <a:r>
-              <a:rPr sz="1600" b="0">
-                <a:solidFill>
-                  <a:srgbClr val="000000"/>
-                </a:solidFill>
-                <a:latin typeface="맑은 고딕"/>
-                <a:ea typeface="맑은 고딕"/>
-              </a:rPr>
-              <a:t> —</a:t>
-            </a:r>
-            <a:r>
-              <a:rPr sz="1400" b="0">
-                <a:solidFill>
-                  <a:srgbClr val="000000"/>
-                </a:solidFill>
-                <a:latin typeface="맑은 고딕"/>
-                <a:ea typeface="맑은 고딕"/>
-              </a:rPr>
-              <a:t> 원격 호출의 실패, 검증된 경계, 조직과 설계</a:t>
-            </a:r>
-          </a:p>
-          <a:p>
-            <a:pPr lvl="3" marL="1077913" indent="-354013">
-              <a:spcBef>
-                <a:spcPts val="600"/>
-              </a:spcBef>
-              <a:spcAft>
-                <a:spcPts val="600"/>
-              </a:spcAft>
-              <a:buSzPct val="90000"/>
-              <a:buFont typeface="Wingdings" pitchFamily="2" charset="2"/>
-              <a:buChar char=""/>
-            </a:pPr>
-            <a:r>
-              <a:rPr sz="1600" b="1">
-                <a:solidFill>
-                  <a:srgbClr val="000000"/>
-                </a:solidFill>
-                <a:latin typeface="맑은 고딕"/>
-                <a:ea typeface="맑은 고딕"/>
-              </a:rPr>
-              <a:t>잘못된 관행</a:t>
-            </a:r>
-            <a:r>
-              <a:rPr sz="1600" b="0">
-                <a:solidFill>
-                  <a:srgbClr val="000000"/>
-                </a:solidFill>
-                <a:latin typeface="맑은 고딕"/>
-                <a:ea typeface="맑은 고딕"/>
-              </a:rPr>
-              <a:t> —</a:t>
-            </a:r>
-            <a:r>
-              <a:rPr sz="1400" b="0">
-                <a:solidFill>
-                  <a:srgbClr val="000000"/>
-                </a:solidFill>
-                <a:latin typeface="맑은 고딕"/>
-                <a:ea typeface="맑은 고딕"/>
-              </a:rPr>
-              <a:t> 서비스부터 나누기, 하나의 전사 모델, 도메인 없는 아키텍처</a:t>
             </a:r>
           </a:p>
           <a:p>
@@ -24996,6 +24822,16 @@
               <a:buChar char=""/>
             </a:pPr>
             <a:r>
+              <a:rPr sz="1800" b="1">
+                <a:solidFill>
+                  <a:srgbClr val="000000"/>
+                </a:solidFill>
+                <a:latin typeface="맑은 고딕"/>
+                <a:ea typeface="맑은 고딕"/>
+              </a:rPr>
+              <a:t>Architecture</a:t>
+            </a:r>
+            <a:r>
               <a:rPr sz="1800" b="0">
                 <a:solidFill>
                   <a:srgbClr val="000000"/>
@@ -25003,11 +24839,21 @@
                 <a:latin typeface="맑은 고딕"/>
                 <a:ea typeface="맑은 고딕"/>
               </a:rPr>
-              <a:t>다음 세션</a:t>
-            </a:r>
-          </a:p>
-          <a:p>
-            <a:pPr lvl="3" marL="1077913" indent="-354013">
+              <a:t> —</a:t>
+            </a:r>
+            <a:r>
+              <a:rPr sz="1600" b="0">
+                <a:solidFill>
+                  <a:srgbClr val="000000"/>
+                </a:solidFill>
+                <a:latin typeface="맑은 고딕"/>
+                <a:ea typeface="맑은 고딕"/>
+              </a:rPr>
+              <a:t> 품질 속성 시나리오와 시스템 수준의 절충, 바꾸기 어려운 결정</a:t>
+            </a:r>
+          </a:p>
+          <a:p>
+            <a:pPr lvl="2" marL="723900" indent="-368300">
               <a:spcBef>
                 <a:spcPts val="600"/>
               </a:spcBef>
@@ -25016,9 +24862,29 @@
               </a:spcAft>
               <a:buSzPct val="90000"/>
               <a:buFont typeface="Wingdings" pitchFamily="2" charset="2"/>
-              <a:buChar char=""/>
+              <a:buChar char=""/>
             </a:pPr>
             <a:r>
+              <a:rPr sz="1800" b="1">
+                <a:solidFill>
+                  <a:srgbClr val="000000"/>
+                </a:solidFill>
+                <a:latin typeface="맑은 고딕"/>
+                <a:ea typeface="맑은 고딕"/>
+              </a:rPr>
+              <a:t>DDD</a:t>
+            </a:r>
+            <a:r>
+              <a:rPr sz="1800" b="0">
+                <a:solidFill>
+                  <a:srgbClr val="000000"/>
+                </a:solidFill>
+                <a:latin typeface="맑은 고딕"/>
+                <a:ea typeface="맑은 고딕"/>
+              </a:rPr>
+              <a:t> —</a:t>
+            </a:r>
+            <a:r>
               <a:rPr sz="1600" b="0">
                 <a:solidFill>
                   <a:srgbClr val="000000"/>
@@ -25026,10 +24892,140 @@
                 <a:latin typeface="맑은 고딕"/>
                 <a:ea typeface="맑은 고딕"/>
               </a:rPr>
+              <a:t> 맥락 안의 모델, 공통 언어의 정제, 핵심 도메인</a:t>
+            </a:r>
+          </a:p>
+          <a:p>
+            <a:pPr lvl="2" marL="723900" indent="-368300">
+              <a:spcBef>
+                <a:spcPts val="600"/>
+              </a:spcBef>
+              <a:spcAft>
+                <a:spcPts val="600"/>
+              </a:spcAft>
+              <a:buSzPct val="90000"/>
+              <a:buFont typeface="Wingdings" pitchFamily="2" charset="2"/>
+              <a:buChar char=""/>
+            </a:pPr>
+            <a:r>
+              <a:rPr sz="1800" b="1">
+                <a:solidFill>
+                  <a:srgbClr val="000000"/>
+                </a:solidFill>
+                <a:latin typeface="맑은 고딕"/>
+                <a:ea typeface="맑은 고딕"/>
+              </a:rPr>
+              <a:t>MSA</a:t>
+            </a:r>
+            <a:r>
+              <a:rPr sz="1800" b="0">
+                <a:solidFill>
+                  <a:srgbClr val="000000"/>
+                </a:solidFill>
+                <a:latin typeface="맑은 고딕"/>
+                <a:ea typeface="맑은 고딕"/>
+              </a:rPr>
+              <a:t> —</a:t>
+            </a:r>
+            <a:r>
+              <a:rPr sz="1600" b="0">
+                <a:solidFill>
+                  <a:srgbClr val="000000"/>
+                </a:solidFill>
+                <a:latin typeface="맑은 고딕"/>
+                <a:ea typeface="맑은 고딕"/>
+              </a:rPr>
+              <a:t> 원격 호출의 실패, 검증된 경계, 조직과 설계</a:t>
+            </a:r>
+          </a:p>
+          <a:p>
+            <a:pPr lvl="2" marL="723900" indent="-368300">
+              <a:spcBef>
+                <a:spcPts val="600"/>
+              </a:spcBef>
+              <a:spcAft>
+                <a:spcPts val="600"/>
+              </a:spcAft>
+              <a:buSzPct val="90000"/>
+              <a:buFont typeface="Wingdings" pitchFamily="2" charset="2"/>
+              <a:buChar char=""/>
+            </a:pPr>
+            <a:r>
+              <a:rPr sz="1800" b="1">
+                <a:solidFill>
+                  <a:srgbClr val="000000"/>
+                </a:solidFill>
+                <a:latin typeface="맑은 고딕"/>
+                <a:ea typeface="맑은 고딕"/>
+              </a:rPr>
+              <a:t>잘못된 관행</a:t>
+            </a:r>
+            <a:r>
+              <a:rPr sz="1800" b="0">
+                <a:solidFill>
+                  <a:srgbClr val="000000"/>
+                </a:solidFill>
+                <a:latin typeface="맑은 고딕"/>
+                <a:ea typeface="맑은 고딕"/>
+              </a:rPr>
+              <a:t> —</a:t>
+            </a:r>
+            <a:r>
+              <a:rPr sz="1600" b="0">
+                <a:solidFill>
+                  <a:srgbClr val="000000"/>
+                </a:solidFill>
+                <a:latin typeface="맑은 고딕"/>
+                <a:ea typeface="맑은 고딕"/>
+              </a:rPr>
+              <a:t> 서비스부터 나누기, 하나의 전사 모델, 도메인 없는 아키텍처</a:t>
+            </a:r>
+          </a:p>
+          <a:p>
+            <a:pPr marL="342900" indent="0">
+              <a:spcBef>
+                <a:spcPts val="600"/>
+              </a:spcBef>
+              <a:spcAft>
+                <a:spcPts val="600"/>
+              </a:spcAft>
+              <a:buNone/>
+            </a:pPr>
+            <a:r>
+              <a:rPr sz="1800" b="1">
+                <a:solidFill>
+                  <a:srgbClr val="000000"/>
+                </a:solidFill>
+                <a:latin typeface="맑은 고딕"/>
+                <a:ea typeface="맑은 고딕"/>
+              </a:rPr>
+              <a:t>다음 세션</a:t>
+            </a:r>
+          </a:p>
+          <a:p>
+            <a:pPr lvl="2" marL="723900" indent="-368300">
+              <a:spcBef>
+                <a:spcPts val="600"/>
+              </a:spcBef>
+              <a:spcAft>
+                <a:spcPts val="600"/>
+              </a:spcAft>
+              <a:buSzPct val="90000"/>
+              <a:buFont typeface="Wingdings" pitchFamily="2" charset="2"/>
+              <a:buChar char=""/>
+            </a:pPr>
+            <a:r>
+              <a:rPr sz="1800" b="0">
+                <a:solidFill>
+                  <a:srgbClr val="000000"/>
+                </a:solidFill>
+                <a:latin typeface="맑은 고딕"/>
+                <a:ea typeface="맑은 고딕"/>
+              </a:rPr>
               <a:t>"</a:t>
             </a:r>
             <a:r>
-              <a:rPr sz="1600" b="1">
+              <a:rPr sz="1800" b="1">
                 <a:solidFill>
                   <a:srgbClr val="000000"/>
                 </a:solidFill>
@@ -25039,17 +25035,17 @@
               <a:t>14. AI-native SW공학</a:t>
             </a:r>
             <a:r>
+              <a:rPr sz="1800" b="0">
+                <a:solidFill>
+                  <a:srgbClr val="000000"/>
+                </a:solidFill>
+                <a:latin typeface="맑은 고딕"/>
+                <a:ea typeface="맑은 고딕"/>
+              </a:rPr>
+              <a:t>" —</a:t>
+            </a:r>
+            <a:r>
               <a:rPr sz="1600" b="0">
-                <a:solidFill>
-                  <a:srgbClr val="000000"/>
-                </a:solidFill>
-                <a:latin typeface="맑은 고딕"/>
-                <a:ea typeface="맑은 고딕"/>
-              </a:rPr>
-              <a:t>" —</a:t>
-            </a:r>
-            <a:r>
-              <a:rPr sz="1400" b="0">
                 <a:solidFill>
                   <a:srgbClr val="000000"/>
                 </a:solidFill>
@@ -29385,7 +29381,7 @@
                 <a:latin typeface="맑은 고딕"/>
                 <a:ea typeface="맑은 고딕"/>
               </a:rPr>
-              <a:t>Ralph Johnson(Martin Fowler, 2003 재인용)</a:t>
+              <a:t>Ralph Johnson, [Fowler 2003c]</a:t>
             </a:r>
           </a:p>
         </p:txBody>
@@ -30598,7 +30594,7 @@
                 <a:latin typeface="맑은 고딕"/>
                 <a:ea typeface="맑은 고딕"/>
               </a:rPr>
-              <a:t>Craig Larman, 2004</a:t>
+              <a:t>[Larman 2004]</a:t>
             </a:r>
           </a:p>
         </p:txBody>
@@ -33158,7 +33154,7 @@
                 <a:latin typeface="맑은 고딕"/>
                 <a:ea typeface="맑은 고딕"/>
               </a:rPr>
-              <a:t>(「05」의 마지막 행)</a:t>
+              <a:t>(「05. 바꾸기 어려운 결정」의 마지막 행)</a:t>
             </a:r>
             <a:r>
               <a:rPr sz="1800" b="0">

--- a/courses/ooad/sessions/s13.pptx
+++ b/courses/ooad/sessions/s13.pptx
@@ -3969,6 +3969,48 @@
               <a:t>15. 마이크로서비스</a:t>
             </a:r>
           </a:p>
+          <a:p>
+            <a:pPr lvl="1" marL="355600" indent="0">
+              <a:spcBef>
+                <a:spcPts val="300"/>
+              </a:spcBef>
+              <a:spcAft>
+                <a:spcPts val="300"/>
+              </a:spcAft>
+              <a:buNone/>
+            </a:pPr>
+            <a:r>
+              <a:rPr sz="1600" b="0">
+                <a:solidFill>
+                  <a:srgbClr val="000000"/>
+                </a:solidFill>
+                <a:latin typeface="맑은 고딕"/>
+                <a:ea typeface="맑은 고딕"/>
+              </a:rPr>
+              <a:t>16. 원격 호출은 다르다</a:t>
+            </a:r>
+          </a:p>
+          <a:p>
+            <a:pPr lvl="1" marL="355600" indent="0">
+              <a:spcBef>
+                <a:spcPts val="300"/>
+              </a:spcBef>
+              <a:spcAft>
+                <a:spcPts val="300"/>
+              </a:spcAft>
+              <a:buNone/>
+            </a:pPr>
+            <a:r>
+              <a:rPr sz="1600" b="0">
+                <a:solidFill>
+                  <a:srgbClr val="000000"/>
+                </a:solidFill>
+                <a:latin typeface="맑은 고딕"/>
+                <a:ea typeface="맑은 고딕"/>
+              </a:rPr>
+              <a:t>17. 분산된 취소</a:t>
+            </a:r>
+          </a:p>
         </p:txBody>
       </p:sp>
       <p:sp>
@@ -4073,48 +4115,6 @@
             <a:normAutofit/>
           </a:bodyPr>
           <a:lstStyle/>
-          <a:p>
-            <a:pPr lvl="1" marL="355600" indent="0">
-              <a:spcBef>
-                <a:spcPts val="300"/>
-              </a:spcBef>
-              <a:spcAft>
-                <a:spcPts val="300"/>
-              </a:spcAft>
-              <a:buNone/>
-            </a:pPr>
-            <a:r>
-              <a:rPr sz="1600" b="0">
-                <a:solidFill>
-                  <a:srgbClr val="000000"/>
-                </a:solidFill>
-                <a:latin typeface="맑은 고딕"/>
-                <a:ea typeface="맑은 고딕"/>
-              </a:rPr>
-              <a:t>16. 원격 호출은 다르다</a:t>
-            </a:r>
-          </a:p>
-          <a:p>
-            <a:pPr lvl="1" marL="355600" indent="0">
-              <a:spcBef>
-                <a:spcPts val="300"/>
-              </a:spcBef>
-              <a:spcAft>
-                <a:spcPts val="300"/>
-              </a:spcAft>
-              <a:buNone/>
-            </a:pPr>
-            <a:r>
-              <a:rPr sz="1600" b="0">
-                <a:solidFill>
-                  <a:srgbClr val="000000"/>
-                </a:solidFill>
-                <a:latin typeface="맑은 고딕"/>
-                <a:ea typeface="맑은 고딕"/>
-              </a:rPr>
-              <a:t>17. 분산된 취소</a:t>
-            </a:r>
-          </a:p>
           <a:p>
             <a:pPr lvl="1" marL="355600" indent="0">
               <a:spcBef>
@@ -13945,7 +13945,7 @@
         </p:blipFill>
         <p:spPr>
           <a:xfrm>
-            <a:off x="3305663" y="3434363"/>
+            <a:off x="3305663" y="3434362"/>
             <a:ext cx="2532673" cy="2413000"/>
           </a:xfrm>
           <a:prstGeom prst="rect">
@@ -19053,7 +19053,7 @@
         <p:spPr>
           <a:xfrm>
             <a:off x="365760" y="960120"/>
-            <a:ext cx="8622792" cy="5522976"/>
+            <a:ext cx="8622792" cy="5352345"/>
           </a:xfrm>
         </p:spPr>
         <p:txBody>
@@ -22248,7 +22248,7 @@
         <p:spPr>
           <a:xfrm>
             <a:off x="233172" y="1414318"/>
-            <a:ext cx="4338828" cy="5068778"/>
+            <a:ext cx="4338828" cy="4898147"/>
           </a:xfrm>
         </p:spPr>
         <p:txBody>
@@ -22413,7 +22413,7 @@
         <p:spPr>
           <a:xfrm>
             <a:off x="4572000" y="1414318"/>
-            <a:ext cx="4439412" cy="5068778"/>
+            <a:ext cx="4439412" cy="4898147"/>
           </a:xfrm>
         </p:spPr>
         <p:txBody>
@@ -22830,7 +22830,7 @@
         <p:spPr>
           <a:xfrm>
             <a:off x="233172" y="1414318"/>
-            <a:ext cx="4338828" cy="5068778"/>
+            <a:ext cx="4338828" cy="4898147"/>
           </a:xfrm>
         </p:spPr>
         <p:txBody>
@@ -23081,7 +23081,7 @@
         <p:spPr>
           <a:xfrm>
             <a:off x="4572000" y="1414318"/>
-            <a:ext cx="4439412" cy="5068778"/>
+            <a:ext cx="4439412" cy="4898147"/>
           </a:xfrm>
         </p:spPr>
         <p:txBody>

--- a/courses/ooad/sessions/s13.pptx
+++ b/courses/ooad/sessions/s13.pptx
@@ -1695,14 +1695,7 @@
             <a:pPr lvl="0"/>
             <a:r>
               <a:rPr lang="ko-KR" sz="1200"/>
-              <a:t>이 시나리오는 구조를 바꾼다 — 청구를 한 건씩 동기로 하면 2시간을 넘는다. 청구 요청을 모아 보내고 결과 통보를 비동기로 받는 구조가 된다.</a:t>
-            </a:r>
-          </a:p>
-          <a:p>
-            <a:pPr lvl="0"/>
-            <a:r>
-              <a:rPr lang="ko-KR" sz="1200"/>
-              <a:t>재청구는 멱등해야 한다 — "12. 구현·검증·DevOps와 SW공학 피드백"의 판단이다.</a:t>
+              <a:t>다음 세션은 이 과정의 판단 — 문제·모델·경계·책임 — 을 AI Agent에게 맥락으로 주고, 사람이 검증하는 방법을 다룬다.</a:t>
             </a:r>
           </a:p>
         </p:txBody>
@@ -1763,7 +1756,14 @@
             <a:pPr lvl="0"/>
             <a:r>
               <a:rPr lang="ko-KR" sz="1200"/>
-              <a:t>정기배송 맥락의 회차 상태(예정·배송 요청됨·청구됨…)는 외부 맥락에 보내지 않는다. 연동이 외부의 말로 번역한다.</a:t>
+              <a:t>이 시나리오는 구조를 바꾼다 — 청구를 한 건씩 동기로 하면 2시간을 넘는다. 청구 요청을 모아 보내고 결과 통보를 비동기로 받는 구조가 된다.</a:t>
+            </a:r>
+          </a:p>
+          <a:p>
+            <a:pPr lvl="0"/>
+            <a:r>
+              <a:rPr lang="ko-KR" sz="1200"/>
+              <a:t>재청구는 멱등해야 한다 — "12. 구현·검증·DevOps와 SW공학 피드백"의 판단이다.</a:t>
             </a:r>
           </a:p>
         </p:txBody>
@@ -1824,7 +1824,7 @@
             <a:pPr lvl="0"/>
             <a:r>
               <a:rPr lang="ko-KR" sz="1200"/>
-              <a:t>"나누지 않는다"도 결정이다. 다시 열 조건이 있으면 좋은 결정 기록이다.</a:t>
+              <a:t>정기배송 맥락의 회차 상태(예정·배송 요청됨·청구됨…)는 외부 맥락에 보내지 않는다. 연동이 외부의 말로 번역한다.</a:t>
             </a:r>
           </a:p>
         </p:txBody>
@@ -1885,7 +1885,7 @@
             <a:pPr lvl="0"/>
             <a:r>
               <a:rPr lang="ko-KR" sz="1200"/>
-              <a:t>맥락 지도는 외부 시스템이 바뀔 때 다시 그린다. 지금은 기록으로 충분하다.</a:t>
+              <a:t>"나누지 않는다"도 결정이다. 다시 열 조건이 있으면 좋은 결정 기록이다.</a:t>
             </a:r>
           </a:p>
         </p:txBody>
@@ -2014,7 +2014,7 @@
             <a:pPr lvl="0"/>
             <a:r>
               <a:rPr lang="ko-KR" sz="1200"/>
-              <a:t>다음 세션은 이 과정의 판단 — 문제·모델·경계·책임 — 을 AI Agent에게 맥락으로 주고, 사람이 검증하는 방법을 다룬다.</a:t>
+              <a:t>맥락 지도는 외부 시스템이 바뀔 때 다시 그린다. 지금은 기록으로 충분하다.</a:t>
             </a:r>
           </a:p>
         </p:txBody>
@@ -4320,131 +4320,7 @@
                 <a:latin typeface="맑은 고딕"/>
                 <a:ea typeface="맑은 고딕"/>
               </a:rPr>
-              <a:t>25. 품질 속성 시나리오 </a:t>
-            </a:r>
-            <a:r>
-              <a:rPr sz="1200" b="0">
-                <a:solidFill>
-                  <a:srgbClr val="000000"/>
-                </a:solidFill>
-                <a:latin typeface="맑은 고딕"/>
-                <a:ea typeface="맑은 고딕"/>
-              </a:rPr>
-              <a:t>(안)</a:t>
-            </a:r>
-          </a:p>
-          <a:p>
-            <a:pPr lvl="1" marL="355600" indent="0">
-              <a:spcBef>
-                <a:spcPts val="300"/>
-              </a:spcBef>
-              <a:spcAft>
-                <a:spcPts val="300"/>
-              </a:spcAft>
-              <a:buNone/>
-            </a:pPr>
-            <a:r>
-              <a:rPr sz="1600" b="0">
-                <a:solidFill>
-                  <a:srgbClr val="000000"/>
-                </a:solidFill>
-                <a:latin typeface="맑은 고딕"/>
-                <a:ea typeface="맑은 고딕"/>
-              </a:rPr>
-              <a:t>26. 맥락 지도 </a:t>
-            </a:r>
-            <a:r>
-              <a:rPr sz="1200" b="0">
-                <a:solidFill>
-                  <a:srgbClr val="000000"/>
-                </a:solidFill>
-                <a:latin typeface="맑은 고딕"/>
-                <a:ea typeface="맑은 고딕"/>
-              </a:rPr>
-              <a:t>(안)</a:t>
-            </a:r>
-          </a:p>
-          <a:p>
-            <a:pPr lvl="1" marL="355600" indent="0">
-              <a:spcBef>
-                <a:spcPts val="300"/>
-              </a:spcBef>
-              <a:spcAft>
-                <a:spcPts val="300"/>
-              </a:spcAft>
-              <a:buNone/>
-            </a:pPr>
-            <a:r>
-              <a:rPr sz="1600" b="0">
-                <a:solidFill>
-                  <a:srgbClr val="000000"/>
-                </a:solidFill>
-                <a:latin typeface="맑은 고딕"/>
-                <a:ea typeface="맑은 고딕"/>
-              </a:rPr>
-              <a:t>27. 서비스 분리 판단 </a:t>
-            </a:r>
-            <a:r>
-              <a:rPr sz="1200" b="0">
-                <a:solidFill>
-                  <a:srgbClr val="000000"/>
-                </a:solidFill>
-                <a:latin typeface="맑은 고딕"/>
-                <a:ea typeface="맑은 고딕"/>
-              </a:rPr>
-              <a:t>(안)</a:t>
-            </a:r>
-          </a:p>
-          <a:p>
-            <a:pPr lvl="1" marL="355600" indent="0">
-              <a:spcBef>
-                <a:spcPts val="300"/>
-              </a:spcBef>
-              <a:spcAft>
-                <a:spcPts val="300"/>
-              </a:spcAft>
-              <a:buNone/>
-            </a:pPr>
-            <a:r>
-              <a:rPr sz="1600" b="0">
-                <a:solidFill>
-                  <a:srgbClr val="000000"/>
-                </a:solidFill>
-                <a:latin typeface="맑은 고딕"/>
-                <a:ea typeface="맑은 고딕"/>
-              </a:rPr>
-              <a:t>28. 확장 보완 </a:t>
-            </a:r>
-            <a:r>
-              <a:rPr sz="1200" b="0">
-                <a:solidFill>
-                  <a:srgbClr val="000000"/>
-                </a:solidFill>
-                <a:latin typeface="맑은 고딕"/>
-                <a:ea typeface="맑은 고딕"/>
-              </a:rPr>
-              <a:t>(안)</a:t>
-            </a:r>
-          </a:p>
-          <a:p>
-            <a:pPr lvl="1" marL="355600" indent="0">
-              <a:spcBef>
-                <a:spcPts val="300"/>
-              </a:spcBef>
-              <a:spcAft>
-                <a:spcPts val="300"/>
-              </a:spcAft>
-              <a:buNone/>
-            </a:pPr>
-            <a:r>
-              <a:rPr sz="1600" b="0">
-                <a:solidFill>
-                  <a:srgbClr val="000000"/>
-                </a:solidFill>
-                <a:latin typeface="맑은 고딕"/>
-                <a:ea typeface="맑은 고딕"/>
-              </a:rPr>
-              <a:t>29. 요약</a:t>
+              <a:t>25. 요약</a:t>
             </a:r>
           </a:p>
         </p:txBody>
@@ -12208,7 +12084,7 @@
                 <a:latin typeface="맑은 고딕"/>
                 <a:ea typeface="맑은 고딕"/>
               </a:rPr>
-              <a:t>"the microservice architectural style is an approach to developing a single application as a suite of small services, each running in its own process and communicating with lightweight mechanisms"</a:t>
+              <a:t>"the microservice architectural style … is an approach to developing a single application as a suite of small services, each running in its own process and communicating with lightweight mechanisms"</a:t>
             </a:r>
             <a:r>
               <a:rPr sz="1000" b="0">
@@ -19053,7 +18929,7 @@
         <p:spPr>
           <a:xfrm>
             <a:off x="365760" y="960120"/>
-            <a:ext cx="8622792" cy="5352345"/>
+            <a:ext cx="8412480" cy="5257800"/>
           </a:xfrm>
         </p:spPr>
         <p:txBody>
@@ -19135,7 +19011,7 @@
               <a:buChar char=""/>
             </a:pPr>
             <a:r>
-              <a:rPr sz="1800" b="1">
+              <a:rPr sz="1600" b="1">
                 <a:solidFill>
                   <a:srgbClr val="000000"/>
                 </a:solidFill>
@@ -19156,7 +19032,7 @@
               <a:buNone/>
             </a:pPr>
             <a:r>
-              <a:rPr sz="1600" b="0">
+              <a:rPr sz="1400" b="0">
                 <a:solidFill>
                   <a:srgbClr val="000000"/>
                 </a:solidFill>
@@ -19166,7 +19042,7 @@
               <a:t>실습 2~12의 </a:t>
             </a:r>
             <a:r>
-              <a:rPr sz="1600" b="1">
+              <a:rPr sz="1400" b="1">
                 <a:solidFill>
                   <a:srgbClr val="000000"/>
                 </a:solidFill>
@@ -19199,7 +19075,7 @@
               <a:buChar char=""/>
             </a:pPr>
             <a:r>
-              <a:rPr sz="1800" b="1">
+              <a:rPr sz="1600" b="1">
                 <a:solidFill>
                   <a:srgbClr val="000000"/>
                 </a:solidFill>
@@ -19220,7 +19096,7 @@
               <a:buNone/>
             </a:pPr>
             <a:r>
-              <a:rPr sz="1600" b="0">
+              <a:rPr sz="1400" b="0">
                 <a:solidFill>
                   <a:srgbClr val="000000"/>
                 </a:solidFill>
@@ -19230,7 +19106,7 @@
               <a:t>① "정기배송의 </a:t>
             </a:r>
             <a:r>
-              <a:rPr sz="1600" b="1">
+              <a:rPr sz="1400" b="1">
                 <a:solidFill>
                   <a:srgbClr val="000000"/>
                 </a:solidFill>
@@ -19240,7 +19116,7 @@
               <a:t>품질 속성 시나리오</a:t>
             </a:r>
             <a:r>
-              <a:rPr sz="1600" b="0">
+              <a:rPr sz="1400" b="0">
                 <a:solidFill>
                   <a:srgbClr val="000000"/>
                 </a:solidFill>
@@ -19261,7 +19137,7 @@
               <a:buNone/>
             </a:pPr>
             <a:r>
-              <a:rPr sz="1600" b="0">
+              <a:rPr sz="1400" b="0">
                 <a:solidFill>
                   <a:srgbClr val="000000"/>
                 </a:solidFill>
@@ -19271,7 +19147,7 @@
               <a:t>② "정기배송·결제·배송·회계의 </a:t>
             </a:r>
             <a:r>
-              <a:rPr sz="1600" b="1">
+              <a:rPr sz="1400" b="1">
                 <a:solidFill>
                   <a:srgbClr val="000000"/>
                 </a:solidFill>
@@ -19281,7 +19157,7 @@
               <a:t>맥락 지도</a:t>
             </a:r>
             <a:r>
-              <a:rPr sz="1600" b="0">
+              <a:rPr sz="1400" b="0">
                 <a:solidFill>
                   <a:srgbClr val="000000"/>
                 </a:solidFill>
@@ -19302,7 +19178,7 @@
               <a:buNone/>
             </a:pPr>
             <a:r>
-              <a:rPr sz="1600" b="0">
+              <a:rPr sz="1400" b="0">
                 <a:solidFill>
                   <a:srgbClr val="000000"/>
                 </a:solidFill>
@@ -19312,7 +19188,7 @@
               <a:t>③ "정기배송 시스템을 </a:t>
             </a:r>
             <a:r>
-              <a:rPr sz="1600" b="1">
+              <a:rPr sz="1400" b="1">
                 <a:solidFill>
                   <a:srgbClr val="000000"/>
                 </a:solidFill>
@@ -19322,7 +19198,7 @@
               <a:t>서비스로 나눌지</a:t>
             </a:r>
             <a:r>
-              <a:rPr sz="1600" b="0">
+              <a:rPr sz="1400" b="0">
                 <a:solidFill>
                   <a:srgbClr val="000000"/>
                 </a:solidFill>
@@ -19345,7 +19221,7 @@
               <a:buChar char=""/>
             </a:pPr>
             <a:r>
-              <a:rPr sz="1800" b="1">
+              <a:rPr sz="1600" b="1">
                 <a:solidFill>
                   <a:srgbClr val="000000"/>
                 </a:solidFill>
@@ -19366,7 +19242,7 @@
               <a:buNone/>
             </a:pPr>
             <a:r>
-              <a:rPr sz="1600" b="0">
+              <a:rPr sz="1400" b="0">
                 <a:solidFill>
                   <a:srgbClr val="000000"/>
                 </a:solidFill>
@@ -19376,7 +19252,7 @@
               <a:t>1. </a:t>
             </a:r>
             <a:r>
-              <a:rPr sz="1600" b="1">
+              <a:rPr sz="1400" b="1">
                 <a:solidFill>
                   <a:srgbClr val="000000"/>
                 </a:solidFill>
@@ -19386,7 +19262,7 @@
               <a:t>측정</a:t>
             </a:r>
             <a:r>
-              <a:rPr sz="1600" b="0">
+              <a:rPr sz="1400" b="0">
                 <a:solidFill>
                   <a:srgbClr val="000000"/>
                 </a:solidFill>
@@ -19396,7 +19272,7 @@
               <a:t> —</a:t>
             </a:r>
             <a:r>
-              <a:rPr sz="1050" b="0">
+              <a:rPr sz="1200" b="0">
                 <a:solidFill>
                   <a:srgbClr val="000000"/>
                 </a:solidFill>
@@ -19417,7 +19293,7 @@
               <a:buNone/>
             </a:pPr>
             <a:r>
-              <a:rPr sz="1600" b="0">
+              <a:rPr sz="1400" b="0">
                 <a:solidFill>
                   <a:srgbClr val="000000"/>
                 </a:solidFill>
@@ -19427,7 +19303,7 @@
               <a:t>2. </a:t>
             </a:r>
             <a:r>
-              <a:rPr sz="1600" b="1">
+              <a:rPr sz="1400" b="1">
                 <a:solidFill>
                   <a:srgbClr val="000000"/>
                 </a:solidFill>
@@ -19437,7 +19313,7 @@
               <a:t>맥락</a:t>
             </a:r>
             <a:r>
-              <a:rPr sz="1600" b="0">
+              <a:rPr sz="1400" b="0">
                 <a:solidFill>
                   <a:srgbClr val="000000"/>
                 </a:solidFill>
@@ -19447,7 +19323,7 @@
               <a:t> —</a:t>
             </a:r>
             <a:r>
-              <a:rPr sz="1050" b="0">
+              <a:rPr sz="1200" b="0">
                 <a:solidFill>
                   <a:srgbClr val="000000"/>
                 </a:solidFill>
@@ -19468,7 +19344,7 @@
               <a:buNone/>
             </a:pPr>
             <a:r>
-              <a:rPr sz="1600" b="0">
+              <a:rPr sz="1400" b="0">
                 <a:solidFill>
                   <a:srgbClr val="000000"/>
                 </a:solidFill>
@@ -19478,7 +19354,7 @@
               <a:t>3. </a:t>
             </a:r>
             <a:r>
-              <a:rPr sz="1600" b="1">
+              <a:rPr sz="1400" b="1">
                 <a:solidFill>
                   <a:srgbClr val="000000"/>
                 </a:solidFill>
@@ -19488,7 +19364,7 @@
               <a:t>번역</a:t>
             </a:r>
             <a:r>
-              <a:rPr sz="1600" b="0">
+              <a:rPr sz="1400" b="0">
                 <a:solidFill>
                   <a:srgbClr val="000000"/>
                 </a:solidFill>
@@ -19498,7 +19374,7 @@
               <a:t> —</a:t>
             </a:r>
             <a:r>
-              <a:rPr sz="1050" b="0">
+              <a:rPr sz="1200" b="0">
                 <a:solidFill>
                   <a:srgbClr val="000000"/>
                 </a:solidFill>
@@ -19508,7 +19384,7 @@
               <a:t> 외부 맥락과의 관계에 연동</a:t>
             </a:r>
             <a:r>
-              <a:rPr sz="850" b="0">
+              <a:rPr sz="1000" b="0">
                 <a:solidFill>
                   <a:srgbClr val="000000"/>
                 </a:solidFill>
@@ -19518,7 +19394,7 @@
               <a:t>(ACL)</a:t>
             </a:r>
             <a:r>
-              <a:rPr sz="1050" b="0">
+              <a:rPr sz="1200" b="0">
                 <a:solidFill>
                   <a:srgbClr val="000000"/>
                 </a:solidFill>
@@ -19539,7 +19415,7 @@
               <a:buNone/>
             </a:pPr>
             <a:r>
-              <a:rPr sz="1600" b="0">
+              <a:rPr sz="1400" b="0">
                 <a:solidFill>
                   <a:srgbClr val="000000"/>
                 </a:solidFill>
@@ -19549,7 +19425,7 @@
               <a:t>4. </a:t>
             </a:r>
             <a:r>
-              <a:rPr sz="1600" b="1">
+              <a:rPr sz="1400" b="1">
                 <a:solidFill>
                   <a:srgbClr val="000000"/>
                 </a:solidFill>
@@ -19559,7 +19435,7 @@
               <a:t>evidence</a:t>
             </a:r>
             <a:r>
-              <a:rPr sz="1600" b="0">
+              <a:rPr sz="1400" b="0">
                 <a:solidFill>
                   <a:srgbClr val="000000"/>
                 </a:solidFill>
@@ -19569,7 +19445,7 @@
               <a:t> —</a:t>
             </a:r>
             <a:r>
-              <a:rPr sz="1050" b="0">
+              <a:rPr sz="1200" b="0">
                 <a:solidFill>
                   <a:srgbClr val="000000"/>
                 </a:solidFill>
@@ -19590,7 +19466,7 @@
               <a:buNone/>
             </a:pPr>
             <a:r>
-              <a:rPr sz="1600" b="0">
+              <a:rPr sz="1400" b="0">
                 <a:solidFill>
                   <a:srgbClr val="000000"/>
                 </a:solidFill>
@@ -19600,7 +19476,7 @@
               <a:t>5. </a:t>
             </a:r>
             <a:r>
-              <a:rPr sz="1600" b="1">
+              <a:rPr sz="1400" b="1">
                 <a:solidFill>
                   <a:srgbClr val="000000"/>
                 </a:solidFill>
@@ -19610,7 +19486,7 @@
               <a:t>비용</a:t>
             </a:r>
             <a:r>
-              <a:rPr sz="1600" b="0">
+              <a:rPr sz="1400" b="0">
                 <a:solidFill>
                   <a:srgbClr val="000000"/>
                 </a:solidFill>
@@ -19620,7 +19496,7 @@
               <a:t> —</a:t>
             </a:r>
             <a:r>
-              <a:rPr sz="1050" b="0">
+              <a:rPr sz="1200" b="0">
                 <a:solidFill>
                   <a:srgbClr val="000000"/>
                 </a:solidFill>
@@ -19630,7 +19506,7 @@
               <a:t> 나누는 비용</a:t>
             </a:r>
             <a:r>
-              <a:rPr sz="850" b="0">
+              <a:rPr sz="1000" b="0">
                 <a:solidFill>
                   <a:srgbClr val="000000"/>
                 </a:solidFill>
@@ -19640,7 +19516,7 @@
               <a:t>(원격 호출·분산 데이터·운영)</a:t>
             </a:r>
             <a:r>
-              <a:rPr sz="1050" b="0">
+              <a:rPr sz="1200" b="0">
                 <a:solidFill>
                   <a:srgbClr val="000000"/>
                 </a:solidFill>
@@ -19663,7 +19539,7 @@
               <a:buChar char=""/>
             </a:pPr>
             <a:r>
-              <a:rPr sz="1800" b="1">
+              <a:rPr sz="1600" b="1">
                 <a:solidFill>
                   <a:srgbClr val="000000"/>
                 </a:solidFill>
@@ -19673,7 +19549,7 @@
               <a:t>결과물</a:t>
             </a:r>
             <a:r>
-              <a:rPr sz="1800" b="0">
+              <a:rPr sz="1600" b="0">
                 <a:solidFill>
                   <a:srgbClr val="000000"/>
                 </a:solidFill>
@@ -19683,7 +19559,7 @@
               <a:t> —</a:t>
             </a:r>
             <a:r>
-              <a:rPr sz="1050" b="0">
+              <a:rPr sz="1400" b="0">
                 <a:solidFill>
                   <a:srgbClr val="000000"/>
                 </a:solidFill>
@@ -19709,6 +19585,564 @@
 </file>
 
 <file path=ppt/slides/slide26.xml><?xml version="1.0" encoding="utf-8"?>
+<p:sld xmlns:a="http://schemas.openxmlformats.org/drawingml/2006/main" xmlns:r="http://schemas.openxmlformats.org/officeDocument/2006/relationships" xmlns:p="http://schemas.openxmlformats.org/presentationml/2006/main">
+  <p:cSld>
+    <p:spTree>
+      <p:nvGrpSpPr>
+        <p:cNvPr id="1" name="">
+          <a:extLst>
+            <a:ext uri="{FF2B5EF4-FFF2-40B4-BE49-F238E27FC236}">
+              <a16:creationId xmlns:a16="http://schemas.microsoft.com/office/drawing/2014/main" id="{8E4F1F13-426B-086B-7D8C-9A58A0F879DB}"/>
+            </a:ext>
+          </a:extLst>
+        </p:cNvPr>
+        <p:cNvGrpSpPr/>
+        <p:nvPr/>
+      </p:nvGrpSpPr>
+      <p:grpSpPr>
+        <a:xfrm>
+          <a:off x="0" y="0"/>
+          <a:ext cx="0" cy="0"/>
+          <a:chOff x="0" y="0"/>
+          <a:chExt cx="0" cy="0"/>
+        </a:xfrm>
+      </p:grpSpPr>
+      <p:sp>
+        <p:nvSpPr>
+          <p:cNvPr id="2" name="제목 1">
+            <a:extLst>
+              <a:ext uri="{FF2B5EF4-FFF2-40B4-BE49-F238E27FC236}">
+                <a16:creationId xmlns:a16="http://schemas.microsoft.com/office/drawing/2014/main" id="{AA26A92D-924E-0575-9551-F8FD7BFD3FAD}"/>
+              </a:ext>
+            </a:extLst>
+          </p:cNvPr>
+          <p:cNvSpPr>
+            <a:spLocks noGrp="1"/>
+          </p:cNvSpPr>
+          <p:nvPr>
+            <p:ph type="title"/>
+          </p:nvPr>
+        </p:nvSpPr>
+        <p:spPr/>
+        <p:txBody>
+          <a:bodyPr/>
+          <a:lstStyle/>
+          <a:p>
+            <a:r>
+              <a:rPr sz="2400" b="1">
+                <a:solidFill>
+                  <a:srgbClr val="000000"/>
+                </a:solidFill>
+                <a:latin typeface="맑은 고딕"/>
+                <a:ea typeface="맑은 고딕"/>
+              </a:rPr>
+              <a:t>25. 요약</a:t>
+            </a:r>
+          </a:p>
+        </p:txBody>
+      </p:sp>
+      <p:sp>
+        <p:nvSpPr>
+          <p:cNvPr id="3" name="슬라이드 번호 개체 틀 2">
+            <a:extLst>
+              <a:ext uri="{FF2B5EF4-FFF2-40B4-BE49-F238E27FC236}">
+                <a16:creationId xmlns:a16="http://schemas.microsoft.com/office/drawing/2014/main" id="{12CF30EE-4DFD-8063-56B8-B8689E76DFCA}"/>
+              </a:ext>
+            </a:extLst>
+          </p:cNvPr>
+          <p:cNvSpPr>
+            <a:spLocks noGrp="1"/>
+          </p:cNvSpPr>
+          <p:nvPr>
+            <p:ph type="sldNum" sz="quarter" idx="10"/>
+          </p:nvPr>
+        </p:nvSpPr>
+        <p:spPr/>
+        <p:txBody>
+          <a:bodyPr/>
+          <a:lstStyle/>
+          <a:p>
+            <a:pPr>
+              <a:defRPr/>
+            </a:pPr>
+            <a:r>
+              <a:rPr lang="en-US" altLang="ko-KR">
+                <a:solidFill>
+                  <a:prstClr val="black"/>
+                </a:solidFill>
+              </a:rPr>
+              <a:t>- 26 -</a:t>
+            </a:r>
+          </a:p>
+        </p:txBody>
+      </p:sp>
+      <p:sp>
+        <p:nvSpPr>
+          <p:cNvPr id="5" name="텍스트 개체 틀 4">
+            <a:extLst>
+              <a:ext uri="{FF2B5EF4-FFF2-40B4-BE49-F238E27FC236}">
+                <a16:creationId xmlns:a16="http://schemas.microsoft.com/office/drawing/2014/main" id="{D66274C8-E16F-5AEB-614B-D8D32DA3E8C6}"/>
+              </a:ext>
+            </a:extLst>
+          </p:cNvPr>
+          <p:cNvSpPr>
+            <a:spLocks noGrp="1"/>
+          </p:cNvSpPr>
+          <p:nvPr>
+            <p:ph type="body" sz="quarter" idx="11"/>
+          </p:nvPr>
+        </p:nvSpPr>
+        <p:spPr/>
+        <p:txBody>
+          <a:bodyPr/>
+          <a:lstStyle/>
+          <a:p>
+            <a:r>
+              <a:rPr kumimoji="1" lang="en-US" altLang="ko-KR" sz="950" dirty="0" err="1"/>
+              <a:t>13. OOAD에서 전문영역으로 — Architecture · DDD · MSA</a:t>
+            </a:r>
+          </a:p>
+        </p:txBody>
+      </p:sp>
+      <p:sp>
+        <p:nvSpPr>
+          <p:cNvPr id="6" name="텍스트 개체 틀 5">
+            <a:extLst>
+              <a:ext uri="{FF2B5EF4-FFF2-40B4-BE49-F238E27FC236}">
+                <a16:creationId xmlns:a16="http://schemas.microsoft.com/office/drawing/2014/main" id="{A24E58E1-194B-A320-AEEE-24D08685BB67}"/>
+              </a:ext>
+            </a:extLst>
+          </p:cNvPr>
+          <p:cNvSpPr>
+            <a:spLocks noGrp="1"/>
+          </p:cNvSpPr>
+          <p:nvPr>
+            <p:ph type="body" sz="quarter" idx="12"/>
+          </p:nvPr>
+        </p:nvSpPr>
+        <p:spPr/>
+        <p:txBody>
+          <a:bodyPr/>
+          <a:lstStyle/>
+          <a:p>
+            <a:endParaRPr kumimoji="1" lang="ko-KR" altLang="en-US" dirty="0"/>
+          </a:p>
+        </p:txBody>
+      </p:sp>
+      <p:sp>
+        <p:nvSpPr>
+          <p:cNvPr id="7" name="텍스트 개체 틀 6">
+            <a:extLst>
+              <a:ext uri="{FF2B5EF4-FFF2-40B4-BE49-F238E27FC236}">
+                <a16:creationId xmlns:a16="http://schemas.microsoft.com/office/drawing/2014/main" id="{A219F420-613B-6234-45F6-0955A9A4505F}"/>
+              </a:ext>
+            </a:extLst>
+          </p:cNvPr>
+          <p:cNvSpPr>
+            <a:spLocks noGrp="1"/>
+          </p:cNvSpPr>
+          <p:nvPr>
+            <p:ph type="body" sz="quarter" idx="13"/>
+          </p:nvPr>
+        </p:nvSpPr>
+        <p:spPr/>
+        <p:txBody>
+          <a:bodyPr/>
+          <a:lstStyle/>
+          <a:p>
+            <a:endParaRPr kumimoji="1" lang="en-US" altLang="ko-KR" dirty="0"/>
+          </a:p>
+        </p:txBody>
+      </p:sp>
+      <p:sp>
+        <p:nvSpPr>
+          <p:cNvPr id="8" name="내용 개체 틀 7">
+            <a:extLst>
+              <a:ext uri="{FF2B5EF4-FFF2-40B4-BE49-F238E27FC236}">
+                <a16:creationId xmlns:a16="http://schemas.microsoft.com/office/drawing/2014/main" id="{BEBA2C4A-B0BF-F2E4-EA6E-614C99CBA184}"/>
+              </a:ext>
+            </a:extLst>
+          </p:cNvPr>
+          <p:cNvSpPr>
+            <a:spLocks noGrp="1"/>
+          </p:cNvSpPr>
+          <p:nvPr>
+            <p:ph idx="1"/>
+          </p:nvPr>
+        </p:nvSpPr>
+        <p:spPr/>
+        <p:txBody>
+          <a:bodyPr>
+            <a:normAutofit/>
+          </a:bodyPr>
+          <a:lstStyle/>
+          <a:p>
+            <a:pPr marL="0" indent="0">
+              <a:spcBef>
+                <a:spcPts val="600"/>
+              </a:spcBef>
+              <a:spcAft>
+                <a:spcPts val="600"/>
+              </a:spcAft>
+              <a:buNone/>
+            </a:pPr>
+            <a:r>
+              <a:rPr sz="1800" b="0">
+                <a:solidFill>
+                  <a:srgbClr val="000000"/>
+                </a:solidFill>
+                <a:latin typeface="맑은 고딕"/>
+                <a:ea typeface="맑은 고딕"/>
+              </a:rPr>
+              <a:t>이 세션은 OOAD의 판단과 </a:t>
+            </a:r>
+            <a:r>
+              <a:rPr sz="1800" b="1">
+                <a:solidFill>
+                  <a:srgbClr val="000000"/>
+                </a:solidFill>
+                <a:latin typeface="맑은 고딕"/>
+                <a:ea typeface="맑은 고딕"/>
+              </a:rPr>
+              <a:t>전문영역이 더 소유하는 판단</a:t>
+            </a:r>
+            <a:r>
+              <a:rPr sz="1800" b="0">
+                <a:solidFill>
+                  <a:srgbClr val="000000"/>
+                </a:solidFill>
+                <a:latin typeface="맑은 고딕"/>
+                <a:ea typeface="맑은 고딕"/>
+              </a:rPr>
+              <a:t>을 구분했다.</a:t>
+            </a:r>
+          </a:p>
+          <a:p>
+            <a:pPr marL="342900" indent="0">
+              <a:spcBef>
+                <a:spcPts val="600"/>
+              </a:spcBef>
+              <a:spcAft>
+                <a:spcPts val="600"/>
+              </a:spcAft>
+              <a:buNone/>
+            </a:pPr>
+            <a:r>
+              <a:rPr sz="1800" b="1">
+                <a:solidFill>
+                  <a:srgbClr val="000000"/>
+                </a:solidFill>
+                <a:latin typeface="맑은 고딕"/>
+                <a:ea typeface="맑은 고딕"/>
+              </a:rPr>
+              <a:t>OOAD에서 전문영역으로의 핵심</a:t>
+            </a:r>
+          </a:p>
+          <a:p>
+            <a:pPr lvl="2" marL="723900" indent="-368300">
+              <a:spcBef>
+                <a:spcPts val="600"/>
+              </a:spcBef>
+              <a:spcAft>
+                <a:spcPts val="600"/>
+              </a:spcAft>
+              <a:buSzPct val="90000"/>
+              <a:buFont typeface="Wingdings" pitchFamily="2" charset="2"/>
+              <a:buChar char=""/>
+            </a:pPr>
+            <a:r>
+              <a:rPr sz="1800" b="1">
+                <a:solidFill>
+                  <a:srgbClr val="000000"/>
+                </a:solidFill>
+                <a:latin typeface="맑은 고딕"/>
+                <a:ea typeface="맑은 고딕"/>
+              </a:rPr>
+              <a:t>원칙</a:t>
+            </a:r>
+            <a:r>
+              <a:rPr sz="1800" b="0">
+                <a:solidFill>
+                  <a:srgbClr val="000000"/>
+                </a:solidFill>
+                <a:latin typeface="맑은 고딕"/>
+                <a:ea typeface="맑은 고딕"/>
+              </a:rPr>
+              <a:t> —</a:t>
+            </a:r>
+            <a:r>
+              <a:rPr sz="1600" b="0">
+                <a:solidFill>
+                  <a:srgbClr val="000000"/>
+                </a:solidFill>
+                <a:latin typeface="맑은 고딕"/>
+                <a:ea typeface="맑은 고딕"/>
+              </a:rPr>
+              <a:t> OOAD는 전문영역을 대체하지 않고, 문제 이해와 설계 판단의 공통 기반이다</a:t>
+            </a:r>
+          </a:p>
+          <a:p>
+            <a:pPr lvl="2" marL="723900" indent="-368300">
+              <a:spcBef>
+                <a:spcPts val="600"/>
+              </a:spcBef>
+              <a:spcAft>
+                <a:spcPts val="600"/>
+              </a:spcAft>
+              <a:buSzPct val="90000"/>
+              <a:buFont typeface="Wingdings" pitchFamily="2" charset="2"/>
+              <a:buChar char=""/>
+            </a:pPr>
+            <a:r>
+              <a:rPr sz="1800" b="1">
+                <a:solidFill>
+                  <a:srgbClr val="000000"/>
+                </a:solidFill>
+                <a:latin typeface="맑은 고딕"/>
+                <a:ea typeface="맑은 고딕"/>
+              </a:rPr>
+              <a:t>Architecture</a:t>
+            </a:r>
+            <a:r>
+              <a:rPr sz="1800" b="0">
+                <a:solidFill>
+                  <a:srgbClr val="000000"/>
+                </a:solidFill>
+                <a:latin typeface="맑은 고딕"/>
+                <a:ea typeface="맑은 고딕"/>
+              </a:rPr>
+              <a:t> —</a:t>
+            </a:r>
+            <a:r>
+              <a:rPr sz="1600" b="0">
+                <a:solidFill>
+                  <a:srgbClr val="000000"/>
+                </a:solidFill>
+                <a:latin typeface="맑은 고딕"/>
+                <a:ea typeface="맑은 고딕"/>
+              </a:rPr>
+              <a:t> 품질 속성 시나리오와 시스템 수준의 절충, 바꾸기 어려운 결정</a:t>
+            </a:r>
+          </a:p>
+          <a:p>
+            <a:pPr lvl="2" marL="723900" indent="-368300">
+              <a:spcBef>
+                <a:spcPts val="600"/>
+              </a:spcBef>
+              <a:spcAft>
+                <a:spcPts val="600"/>
+              </a:spcAft>
+              <a:buSzPct val="90000"/>
+              <a:buFont typeface="Wingdings" pitchFamily="2" charset="2"/>
+              <a:buChar char=""/>
+            </a:pPr>
+            <a:r>
+              <a:rPr sz="1800" b="1">
+                <a:solidFill>
+                  <a:srgbClr val="000000"/>
+                </a:solidFill>
+                <a:latin typeface="맑은 고딕"/>
+                <a:ea typeface="맑은 고딕"/>
+              </a:rPr>
+              <a:t>DDD</a:t>
+            </a:r>
+            <a:r>
+              <a:rPr sz="1800" b="0">
+                <a:solidFill>
+                  <a:srgbClr val="000000"/>
+                </a:solidFill>
+                <a:latin typeface="맑은 고딕"/>
+                <a:ea typeface="맑은 고딕"/>
+              </a:rPr>
+              <a:t> —</a:t>
+            </a:r>
+            <a:r>
+              <a:rPr sz="1600" b="0">
+                <a:solidFill>
+                  <a:srgbClr val="000000"/>
+                </a:solidFill>
+                <a:latin typeface="맑은 고딕"/>
+                <a:ea typeface="맑은 고딕"/>
+              </a:rPr>
+              <a:t> 맥락 안의 모델, 공통 언어의 정제, 핵심 도메인</a:t>
+            </a:r>
+          </a:p>
+          <a:p>
+            <a:pPr lvl="2" marL="723900" indent="-368300">
+              <a:spcBef>
+                <a:spcPts val="600"/>
+              </a:spcBef>
+              <a:spcAft>
+                <a:spcPts val="600"/>
+              </a:spcAft>
+              <a:buSzPct val="90000"/>
+              <a:buFont typeface="Wingdings" pitchFamily="2" charset="2"/>
+              <a:buChar char=""/>
+            </a:pPr>
+            <a:r>
+              <a:rPr sz="1800" b="1">
+                <a:solidFill>
+                  <a:srgbClr val="000000"/>
+                </a:solidFill>
+                <a:latin typeface="맑은 고딕"/>
+                <a:ea typeface="맑은 고딕"/>
+              </a:rPr>
+              <a:t>MSA</a:t>
+            </a:r>
+            <a:r>
+              <a:rPr sz="1800" b="0">
+                <a:solidFill>
+                  <a:srgbClr val="000000"/>
+                </a:solidFill>
+                <a:latin typeface="맑은 고딕"/>
+                <a:ea typeface="맑은 고딕"/>
+              </a:rPr>
+              <a:t> —</a:t>
+            </a:r>
+            <a:r>
+              <a:rPr sz="1600" b="0">
+                <a:solidFill>
+                  <a:srgbClr val="000000"/>
+                </a:solidFill>
+                <a:latin typeface="맑은 고딕"/>
+                <a:ea typeface="맑은 고딕"/>
+              </a:rPr>
+              <a:t> 원격 호출의 실패, 검증된 경계, 조직과 설계</a:t>
+            </a:r>
+          </a:p>
+          <a:p>
+            <a:pPr lvl="2" marL="723900" indent="-368300">
+              <a:spcBef>
+                <a:spcPts val="600"/>
+              </a:spcBef>
+              <a:spcAft>
+                <a:spcPts val="600"/>
+              </a:spcAft>
+              <a:buSzPct val="90000"/>
+              <a:buFont typeface="Wingdings" pitchFamily="2" charset="2"/>
+              <a:buChar char=""/>
+            </a:pPr>
+            <a:r>
+              <a:rPr sz="1800" b="1">
+                <a:solidFill>
+                  <a:srgbClr val="000000"/>
+                </a:solidFill>
+                <a:latin typeface="맑은 고딕"/>
+                <a:ea typeface="맑은 고딕"/>
+              </a:rPr>
+              <a:t>잘못된 관행</a:t>
+            </a:r>
+            <a:r>
+              <a:rPr sz="1800" b="0">
+                <a:solidFill>
+                  <a:srgbClr val="000000"/>
+                </a:solidFill>
+                <a:latin typeface="맑은 고딕"/>
+                <a:ea typeface="맑은 고딕"/>
+              </a:rPr>
+              <a:t> —</a:t>
+            </a:r>
+            <a:r>
+              <a:rPr sz="1600" b="0">
+                <a:solidFill>
+                  <a:srgbClr val="000000"/>
+                </a:solidFill>
+                <a:latin typeface="맑은 고딕"/>
+                <a:ea typeface="맑은 고딕"/>
+              </a:rPr>
+              <a:t> 서비스부터 나누기, 하나의 전사 모델, 도메인 없는 아키텍처</a:t>
+            </a:r>
+          </a:p>
+          <a:p>
+            <a:pPr marL="342900" indent="0">
+              <a:spcBef>
+                <a:spcPts val="600"/>
+              </a:spcBef>
+              <a:spcAft>
+                <a:spcPts val="600"/>
+              </a:spcAft>
+              <a:buNone/>
+            </a:pPr>
+            <a:r>
+              <a:rPr sz="1800" b="1">
+                <a:solidFill>
+                  <a:srgbClr val="000000"/>
+                </a:solidFill>
+                <a:latin typeface="맑은 고딕"/>
+                <a:ea typeface="맑은 고딕"/>
+              </a:rPr>
+              <a:t>다음 세션</a:t>
+            </a:r>
+          </a:p>
+          <a:p>
+            <a:pPr lvl="2" marL="723900" indent="-368300">
+              <a:spcBef>
+                <a:spcPts val="600"/>
+              </a:spcBef>
+              <a:spcAft>
+                <a:spcPts val="600"/>
+              </a:spcAft>
+              <a:buSzPct val="90000"/>
+              <a:buFont typeface="Wingdings" pitchFamily="2" charset="2"/>
+              <a:buChar char=""/>
+            </a:pPr>
+            <a:r>
+              <a:rPr sz="1800" b="0">
+                <a:solidFill>
+                  <a:srgbClr val="000000"/>
+                </a:solidFill>
+                <a:latin typeface="맑은 고딕"/>
+                <a:ea typeface="맑은 고딕"/>
+              </a:rPr>
+              <a:t>"</a:t>
+            </a:r>
+            <a:r>
+              <a:rPr sz="1800" b="1">
+                <a:solidFill>
+                  <a:srgbClr val="000000"/>
+                </a:solidFill>
+                <a:latin typeface="맑은 고딕"/>
+                <a:ea typeface="맑은 고딕"/>
+              </a:rPr>
+              <a:t>14. AI-native SW공학</a:t>
+            </a:r>
+            <a:r>
+              <a:rPr sz="1800" b="0">
+                <a:solidFill>
+                  <a:srgbClr val="000000"/>
+                </a:solidFill>
+                <a:latin typeface="맑은 고딕"/>
+                <a:ea typeface="맑은 고딕"/>
+              </a:rPr>
+              <a:t>" —</a:t>
+            </a:r>
+            <a:r>
+              <a:rPr sz="1600" b="0">
+                <a:solidFill>
+                  <a:srgbClr val="000000"/>
+                </a:solidFill>
+                <a:latin typeface="맑은 고딕"/>
+                <a:ea typeface="맑은 고딕"/>
+              </a:rPr>
+              <a:t> OOAD의 판단을 Human과 Agent가 어떻게 나누고 검증하는지 연결한다.</a:t>
+            </a:r>
+          </a:p>
+        </p:txBody>
+      </p:sp>
+    </p:spTree>
+    <p:extLst>
+      <p:ext uri="{BB962C8B-B14F-4D97-AF65-F5344CB8AC3E}">
+        <p14:creationId xmlns:p14="http://schemas.microsoft.com/office/powerpoint/2010/main" val="3555436673"/>
+      </p:ext>
+    </p:extLst>
+  </p:cSld>
+  <p:clrMapOvr>
+    <a:masterClrMapping/>
+  </p:clrMapOvr>
+</p:sld>
+</file>
+
+<file path=ppt/slides/slide27.xml><?xml version="1.0" encoding="utf-8"?>
 <p:sld xmlns:a="http://schemas.openxmlformats.org/drawingml/2006/main" xmlns:r="http://schemas.openxmlformats.org/officeDocument/2006/relationships" xmlns:p="http://schemas.openxmlformats.org/presentationml/2006/main">
   <p:cSld>
     <p:spTree>
@@ -19760,7 +20194,7 @@
                 <a:latin typeface="맑은 고딕"/>
                 <a:ea typeface="맑은 고딕"/>
               </a:rPr>
-              <a:t>25. 품질 속성 시나리오 </a:t>
+              <a:t>품질 속성 시나리오 </a:t>
             </a:r>
             <a:r>
               <a:rPr sz="1800" b="1">
@@ -19771,6 +20205,18 @@
                 <a:ea typeface="맑은 고딕"/>
               </a:rPr>
               <a:t>(안)</a:t>
+            </a:r>
+          </a:p>
+          <a:p>
+            <a:r>
+              <a:rPr sz="1100" b="1">
+                <a:solidFill>
+                  <a:srgbClr val="000000"/>
+                </a:solidFill>
+                <a:latin typeface="맑은 고딕"/>
+                <a:ea typeface="맑은 고딕"/>
+              </a:rPr>
+              <a:t>별첨. 실습 답</a:t>
             </a:r>
           </a:p>
         </p:txBody>
@@ -19797,8 +20243,8 @@
           <a:lstStyle/>
           <a:p>
             <a:r>
-              <a:rPr kumimoji="1" lang="en-US" altLang="ko-KR" sz="950" dirty="0" err="1"/>
-              <a:t>13. OOAD에서 전문영역으로 — Architecture · DDD · MSA</a:t>
+              <a:rPr kumimoji="1" lang="en-US" altLang="ko-KR" sz="900" dirty="0" err="1"/>
+              <a:t>별첨: 13. OOAD에서 전문영역으로 — Architecture · DDD · MSA</a:t>
             </a:r>
           </a:p>
         </p:txBody>
@@ -20825,7 +21271,7 @@
                 <a:ea typeface="맑은 고딕" panose="020B0503020000020004" pitchFamily="34" charset="-127"/>
                 <a:cs typeface="+mn-cs"/>
               </a:rPr>
-              <a:t>- 26 -</a:t>
+              <a:t>- 27 -</a:t>
             </a:r>
           </a:p>
         </p:txBody>
@@ -20843,7 +21289,7 @@
 </p:sld>
 </file>
 
-<file path=ppt/slides/slide27.xml><?xml version="1.0" encoding="utf-8"?>
+<file path=ppt/slides/slide28.xml><?xml version="1.0" encoding="utf-8"?>
 <p:sld xmlns:a="http://schemas.openxmlformats.org/drawingml/2006/main" xmlns:r="http://schemas.openxmlformats.org/officeDocument/2006/relationships" xmlns:p="http://schemas.openxmlformats.org/presentationml/2006/main">
   <p:cSld>
     <p:spTree>
@@ -20895,7 +21341,7 @@
                 <a:latin typeface="맑은 고딕"/>
                 <a:ea typeface="맑은 고딕"/>
               </a:rPr>
-              <a:t>26. 맥락 지도 </a:t>
+              <a:t>맥락 지도 </a:t>
             </a:r>
             <a:r>
               <a:rPr sz="1800" b="1">
@@ -20906,6 +21352,18 @@
                 <a:ea typeface="맑은 고딕"/>
               </a:rPr>
               <a:t>(안)</a:t>
+            </a:r>
+          </a:p>
+          <a:p>
+            <a:r>
+              <a:rPr sz="1100" b="1">
+                <a:solidFill>
+                  <a:srgbClr val="000000"/>
+                </a:solidFill>
+                <a:latin typeface="맑은 고딕"/>
+                <a:ea typeface="맑은 고딕"/>
+              </a:rPr>
+              <a:t>별첨. 실습 답</a:t>
             </a:r>
           </a:p>
         </p:txBody>
@@ -20932,8 +21390,8 @@
           <a:lstStyle/>
           <a:p>
             <a:r>
-              <a:rPr kumimoji="1" lang="en-US" altLang="ko-KR" sz="950" dirty="0" err="1"/>
-              <a:t>13. OOAD에서 전문영역으로 — Architecture · DDD · MSA</a:t>
+              <a:rPr kumimoji="1" lang="en-US" altLang="ko-KR" sz="900" dirty="0" err="1"/>
+              <a:t>별첨: 13. OOAD에서 전문영역으로 — Architecture · DDD · MSA</a:t>
             </a:r>
           </a:p>
         </p:txBody>
@@ -22031,7 +22489,7 @@
                 <a:ea typeface="맑은 고딕" panose="020B0503020000020004" pitchFamily="34" charset="-127"/>
                 <a:cs typeface="+mn-cs"/>
               </a:rPr>
-              <a:t>- 27 -</a:t>
+              <a:t>- 28 -</a:t>
             </a:r>
           </a:p>
         </p:txBody>
@@ -22040,588 +22498,6 @@
     <p:extLst>
       <p:ext uri="{BB962C8B-B14F-4D97-AF65-F5344CB8AC3E}">
         <p14:creationId xmlns:p14="http://schemas.microsoft.com/office/powerpoint/2010/main" val="2789569477"/>
-      </p:ext>
-    </p:extLst>
-  </p:cSld>
-  <p:clrMapOvr>
-    <a:masterClrMapping/>
-  </p:clrMapOvr>
-</p:sld>
-</file>
-
-<file path=ppt/slides/slide28.xml><?xml version="1.0" encoding="utf-8"?>
-<p:sld xmlns:a="http://schemas.openxmlformats.org/drawingml/2006/main" xmlns:r="http://schemas.openxmlformats.org/officeDocument/2006/relationships" xmlns:p="http://schemas.openxmlformats.org/presentationml/2006/main">
-  <p:cSld>
-    <p:spTree>
-      <p:nvGrpSpPr>
-        <p:cNvPr id="1" name="">
-          <a:extLst>
-            <a:ext uri="{FF2B5EF4-FFF2-40B4-BE49-F238E27FC236}">
-              <a16:creationId xmlns:a16="http://schemas.microsoft.com/office/drawing/2014/main" id="{8E4F1F13-426B-086B-7D8C-9A58A0F879DB}"/>
-            </a:ext>
-          </a:extLst>
-        </p:cNvPr>
-        <p:cNvGrpSpPr/>
-        <p:nvPr/>
-      </p:nvGrpSpPr>
-      <p:grpSpPr>
-        <a:xfrm>
-          <a:off x="0" y="0"/>
-          <a:ext cx="0" cy="0"/>
-          <a:chOff x="0" y="0"/>
-          <a:chExt cx="0" cy="0"/>
-        </a:xfrm>
-      </p:grpSpPr>
-      <p:sp>
-        <p:nvSpPr>
-          <p:cNvPr id="2" name="제목 1">
-            <a:extLst>
-              <a:ext uri="{FF2B5EF4-FFF2-40B4-BE49-F238E27FC236}">
-                <a16:creationId xmlns:a16="http://schemas.microsoft.com/office/drawing/2014/main" id="{AA26A92D-924E-0575-9551-F8FD7BFD3FAD}"/>
-              </a:ext>
-            </a:extLst>
-          </p:cNvPr>
-          <p:cNvSpPr>
-            <a:spLocks noGrp="1"/>
-          </p:cNvSpPr>
-          <p:nvPr>
-            <p:ph type="title"/>
-          </p:nvPr>
-        </p:nvSpPr>
-        <p:spPr/>
-        <p:txBody>
-          <a:bodyPr/>
-          <a:lstStyle/>
-          <a:p>
-            <a:r>
-              <a:rPr sz="2400" b="1">
-                <a:solidFill>
-                  <a:srgbClr val="000000"/>
-                </a:solidFill>
-                <a:latin typeface="맑은 고딕"/>
-                <a:ea typeface="맑은 고딕"/>
-              </a:rPr>
-              <a:t>27. 서비스 분리 판단 </a:t>
-            </a:r>
-            <a:r>
-              <a:rPr sz="1800" b="1">
-                <a:solidFill>
-                  <a:srgbClr val="000000"/>
-                </a:solidFill>
-                <a:latin typeface="맑은 고딕"/>
-                <a:ea typeface="맑은 고딕"/>
-              </a:rPr>
-              <a:t>(안)</a:t>
-            </a:r>
-          </a:p>
-        </p:txBody>
-      </p:sp>
-      <p:sp>
-        <p:nvSpPr>
-          <p:cNvPr id="3" name="슬라이드 번호 개체 틀 2">
-            <a:extLst>
-              <a:ext uri="{FF2B5EF4-FFF2-40B4-BE49-F238E27FC236}">
-                <a16:creationId xmlns:a16="http://schemas.microsoft.com/office/drawing/2014/main" id="{12CF30EE-4DFD-8063-56B8-B8689E76DFCA}"/>
-              </a:ext>
-            </a:extLst>
-          </p:cNvPr>
-          <p:cNvSpPr>
-            <a:spLocks noGrp="1"/>
-          </p:cNvSpPr>
-          <p:nvPr>
-            <p:ph type="sldNum" sz="quarter" idx="10"/>
-          </p:nvPr>
-        </p:nvSpPr>
-        <p:spPr/>
-        <p:txBody>
-          <a:bodyPr/>
-          <a:lstStyle/>
-          <a:p>
-            <a:pPr>
-              <a:defRPr/>
-            </a:pPr>
-            <a:r>
-              <a:rPr lang="en-US" altLang="ko-KR">
-                <a:solidFill>
-                  <a:prstClr val="black"/>
-                </a:solidFill>
-              </a:rPr>
-              <a:t>- 28 -</a:t>
-            </a:r>
-          </a:p>
-        </p:txBody>
-      </p:sp>
-      <p:sp>
-        <p:nvSpPr>
-          <p:cNvPr id="5" name="텍스트 개체 틀 4">
-            <a:extLst>
-              <a:ext uri="{FF2B5EF4-FFF2-40B4-BE49-F238E27FC236}">
-                <a16:creationId xmlns:a16="http://schemas.microsoft.com/office/drawing/2014/main" id="{D66274C8-E16F-5AEB-614B-D8D32DA3E8C6}"/>
-              </a:ext>
-            </a:extLst>
-          </p:cNvPr>
-          <p:cNvSpPr>
-            <a:spLocks noGrp="1"/>
-          </p:cNvSpPr>
-          <p:nvPr>
-            <p:ph type="body" sz="quarter" idx="11"/>
-          </p:nvPr>
-        </p:nvSpPr>
-        <p:spPr/>
-        <p:txBody>
-          <a:bodyPr/>
-          <a:lstStyle/>
-          <a:p>
-            <a:r>
-              <a:rPr kumimoji="1" lang="en-US" altLang="ko-KR" sz="950" dirty="0" err="1"/>
-              <a:t>13. OOAD에서 전문영역으로 — Architecture · DDD · MSA</a:t>
-            </a:r>
-          </a:p>
-        </p:txBody>
-      </p:sp>
-      <p:sp>
-        <p:nvSpPr>
-          <p:cNvPr id="6" name="텍스트 개체 틀 5">
-            <a:extLst>
-              <a:ext uri="{FF2B5EF4-FFF2-40B4-BE49-F238E27FC236}">
-                <a16:creationId xmlns:a16="http://schemas.microsoft.com/office/drawing/2014/main" id="{A24E58E1-194B-A320-AEEE-24D08685BB67}"/>
-              </a:ext>
-            </a:extLst>
-          </p:cNvPr>
-          <p:cNvSpPr>
-            <a:spLocks noGrp="1"/>
-          </p:cNvSpPr>
-          <p:nvPr>
-            <p:ph type="body" sz="quarter" idx="12"/>
-          </p:nvPr>
-        </p:nvSpPr>
-        <p:spPr/>
-        <p:txBody>
-          <a:bodyPr/>
-          <a:lstStyle/>
-          <a:p>
-            <a:endParaRPr kumimoji="1" lang="ko-KR" altLang="en-US" dirty="0"/>
-          </a:p>
-        </p:txBody>
-      </p:sp>
-      <p:sp>
-        <p:nvSpPr>
-          <p:cNvPr id="7" name="텍스트 개체 틀 6">
-            <a:extLst>
-              <a:ext uri="{FF2B5EF4-FFF2-40B4-BE49-F238E27FC236}">
-                <a16:creationId xmlns:a16="http://schemas.microsoft.com/office/drawing/2014/main" id="{A219F420-613B-6234-45F6-0955A9A4505F}"/>
-              </a:ext>
-            </a:extLst>
-          </p:cNvPr>
-          <p:cNvSpPr>
-            <a:spLocks noGrp="1"/>
-          </p:cNvSpPr>
-          <p:nvPr>
-            <p:ph type="body" sz="quarter" idx="13"/>
-          </p:nvPr>
-        </p:nvSpPr>
-        <p:spPr/>
-        <p:txBody>
-          <a:bodyPr/>
-          <a:lstStyle/>
-          <a:p>
-            <a:endParaRPr kumimoji="1" lang="en-US" altLang="ko-KR" dirty="0"/>
-          </a:p>
-        </p:txBody>
-      </p:sp>
-      <p:sp>
-        <p:nvSpPr>
-          <p:cNvPr id="8" name="내용 개체 틀 7">
-            <a:extLst>
-              <a:ext uri="{FF2B5EF4-FFF2-40B4-BE49-F238E27FC236}">
-                <a16:creationId xmlns:a16="http://schemas.microsoft.com/office/drawing/2014/main" id="{BEBA2C4A-B0BF-F2E4-EA6E-614C99CBA184}"/>
-              </a:ext>
-            </a:extLst>
-          </p:cNvPr>
-          <p:cNvSpPr>
-            <a:spLocks noGrp="1"/>
-          </p:cNvSpPr>
-          <p:nvPr>
-            <p:ph idx="1"/>
-          </p:nvPr>
-        </p:nvSpPr>
-        <p:spPr>
-          <a:xfrm>
-            <a:off x="233172" y="1414318"/>
-            <a:ext cx="4338828" cy="4898147"/>
-          </a:xfrm>
-        </p:spPr>
-        <p:txBody>
-          <a:bodyPr>
-            <a:normAutofit/>
-          </a:bodyPr>
-          <a:lstStyle/>
-          <a:p>
-            <a:pPr lvl="2" marL="228600" indent="-182880">
-              <a:spcBef>
-                <a:spcPts val="300"/>
-              </a:spcBef>
-              <a:spcAft>
-                <a:spcPts val="300"/>
-              </a:spcAft>
-              <a:buSzPct val="90000"/>
-              <a:buFont typeface="Wingdings" pitchFamily="2" charset="2"/>
-              <a:buChar char=""/>
-            </a:pPr>
-            <a:r>
-              <a:rPr sz="1400" b="1">
-                <a:solidFill>
-                  <a:srgbClr val="000000"/>
-                </a:solidFill>
-                <a:latin typeface="맑은 고딕"/>
-                <a:ea typeface="맑은 고딕"/>
-              </a:rPr>
-              <a:t>판단</a:t>
-            </a:r>
-          </a:p>
-          <a:p>
-            <a:pPr lvl="3" marL="457200" indent="-182880">
-              <a:spcBef>
-                <a:spcPts val="300"/>
-              </a:spcBef>
-              <a:spcAft>
-                <a:spcPts val="300"/>
-              </a:spcAft>
-              <a:buSzPct val="90000"/>
-              <a:buFont typeface="Wingdings" pitchFamily="2" charset="2"/>
-              <a:buChar char=""/>
-            </a:pPr>
-            <a:r>
-              <a:rPr sz="1200" b="1">
-                <a:solidFill>
-                  <a:srgbClr val="000000"/>
-                </a:solidFill>
-                <a:latin typeface="맑은 고딕"/>
-                <a:ea typeface="맑은 고딕"/>
-              </a:rPr>
-              <a:t>모놀리스 유지</a:t>
-            </a:r>
-            <a:r>
-              <a:rPr sz="1200" b="0">
-                <a:solidFill>
-                  <a:srgbClr val="000000"/>
-                </a:solidFill>
-                <a:latin typeface="맑은 고딕"/>
-                <a:ea typeface="맑은 고딕"/>
-              </a:rPr>
-              <a:t> —</a:t>
-            </a:r>
-            <a:r>
-              <a:rPr sz="1000" b="0">
-                <a:solidFill>
-                  <a:srgbClr val="000000"/>
-                </a:solidFill>
-                <a:latin typeface="맑은 고딕"/>
-                <a:ea typeface="맑은 고딕"/>
-              </a:rPr>
-              <a:t> 팀 하나, 업무 규칙이 회차 상태에 모여 있다.</a:t>
-            </a:r>
-          </a:p>
-        </p:txBody>
-      </p:sp>
-      <p:sp>
-        <p:nvSpPr>
-          <p:cNvPr id="9" name="내용 개체 틀 7">
-            <a:extLst>
-              <a:ext uri="{FF2B5EF4-FFF2-40B4-BE49-F238E27FC236}">
-                <a16:creationId xmlns:a16="http://schemas.microsoft.com/office/drawing/2014/main" id="{BEBA2C4A-B0BF-F2E4-EA6E-614C99CBA184}"/>
-              </a:ext>
-            </a:extLst>
-          </p:cNvPr>
-          <p:cNvSpPr>
-            <a:spLocks noGrp="1"/>
-          </p:cNvSpPr>
-          <p:nvPr>
-            <p:ph idx="1"/>
-          </p:nvPr>
-        </p:nvSpPr>
-        <p:spPr>
-          <a:xfrm>
-            <a:off x="233172" y="960120"/>
-            <a:ext cx="8778240" cy="454198"/>
-          </a:xfrm>
-        </p:spPr>
-        <p:txBody>
-          <a:bodyPr>
-            <a:normAutofit/>
-          </a:bodyPr>
-          <a:lstStyle/>
-          <a:p>
-            <a:pPr marL="0" indent="0">
-              <a:spcBef>
-                <a:spcPts val="300"/>
-              </a:spcBef>
-              <a:spcAft>
-                <a:spcPts val="300"/>
-              </a:spcAft>
-              <a:buNone/>
-            </a:pPr>
-            <a:r>
-              <a:rPr sz="1400" b="0">
-                <a:solidFill>
-                  <a:srgbClr val="000000"/>
-                </a:solidFill>
-                <a:latin typeface="맑은 고딕"/>
-                <a:ea typeface="맑은 고딕"/>
-              </a:rPr>
-              <a:t>정기배송은 지금 </a:t>
-            </a:r>
-            <a:r>
-              <a:rPr sz="1400" b="1">
-                <a:solidFill>
-                  <a:srgbClr val="000000"/>
-                </a:solidFill>
-                <a:latin typeface="맑은 고딕"/>
-                <a:ea typeface="맑은 고딕"/>
-              </a:rPr>
-              <a:t>서비스로 나누지 않는다</a:t>
-            </a:r>
-            <a:r>
-              <a:rPr sz="1400" b="0">
-                <a:solidFill>
-                  <a:srgbClr val="000000"/>
-                </a:solidFill>
-                <a:latin typeface="맑은 고딕"/>
-                <a:ea typeface="맑은 고딕"/>
-              </a:rPr>
-              <a:t>. 모듈 경계를 유지하고, 나눌 조건을 결정 기록에 둔다.</a:t>
-            </a:r>
-          </a:p>
-        </p:txBody>
-      </p:sp>
-      <p:sp>
-        <p:nvSpPr>
-          <p:cNvPr id="10" name="내용 개체 틀 7">
-            <a:extLst>
-              <a:ext uri="{FF2B5EF4-FFF2-40B4-BE49-F238E27FC236}">
-                <a16:creationId xmlns:a16="http://schemas.microsoft.com/office/drawing/2014/main" id="{BEBA2C4A-B0BF-F2E4-EA6E-614C99CBA184}"/>
-              </a:ext>
-            </a:extLst>
-          </p:cNvPr>
-          <p:cNvSpPr>
-            <a:spLocks noGrp="1"/>
-          </p:cNvSpPr>
-          <p:nvPr>
-            <p:ph idx="1"/>
-          </p:nvPr>
-        </p:nvSpPr>
-        <p:spPr>
-          <a:xfrm>
-            <a:off x="4572000" y="1414318"/>
-            <a:ext cx="4439412" cy="4898147"/>
-          </a:xfrm>
-        </p:spPr>
-        <p:txBody>
-          <a:bodyPr>
-            <a:normAutofit/>
-          </a:bodyPr>
-          <a:lstStyle/>
-          <a:p>
-            <a:pPr lvl="2" marL="228600" indent="-182880">
-              <a:spcBef>
-                <a:spcPts val="300"/>
-              </a:spcBef>
-              <a:spcAft>
-                <a:spcPts val="300"/>
-              </a:spcAft>
-              <a:buSzPct val="90000"/>
-              <a:buFont typeface="Wingdings" pitchFamily="2" charset="2"/>
-              <a:buChar char=""/>
-            </a:pPr>
-            <a:r>
-              <a:rPr sz="1400" b="1">
-                <a:solidFill>
-                  <a:srgbClr val="000000"/>
-                </a:solidFill>
-                <a:latin typeface="맑은 고딕"/>
-                <a:ea typeface="맑은 고딕"/>
-              </a:rPr>
-              <a:t>근거</a:t>
-            </a:r>
-          </a:p>
-          <a:p>
-            <a:pPr lvl="3" marL="457200" indent="-182880">
-              <a:spcBef>
-                <a:spcPts val="300"/>
-              </a:spcBef>
-              <a:spcAft>
-                <a:spcPts val="300"/>
-              </a:spcAft>
-              <a:buSzPct val="90000"/>
-              <a:buFont typeface="Wingdings" pitchFamily="2" charset="2"/>
-              <a:buChar char=""/>
-            </a:pPr>
-            <a:r>
-              <a:rPr sz="1200" b="1">
-                <a:solidFill>
-                  <a:srgbClr val="000000"/>
-                </a:solidFill>
-                <a:latin typeface="맑은 고딕"/>
-                <a:ea typeface="맑은 고딕"/>
-              </a:rPr>
-              <a:t>evidence</a:t>
-            </a:r>
-            <a:r>
-              <a:rPr sz="1200" b="0">
-                <a:solidFill>
-                  <a:srgbClr val="000000"/>
-                </a:solidFill>
-                <a:latin typeface="맑은 고딕"/>
-                <a:ea typeface="맑은 고딕"/>
-              </a:rPr>
-              <a:t> —</a:t>
-            </a:r>
-            <a:r>
-              <a:rPr sz="1000" b="0">
-                <a:solidFill>
-                  <a:srgbClr val="000000"/>
-                </a:solidFill>
-                <a:latin typeface="맑은 고딕"/>
-                <a:ea typeface="맑은 고딕"/>
-              </a:rPr>
-              <a:t> 변경이 연동에서 멈췄다. 업무 경계 안의 변경은 아직 적다.</a:t>
-            </a:r>
-          </a:p>
-          <a:p>
-            <a:pPr lvl="3" marL="457200" indent="-182880">
-              <a:spcBef>
-                <a:spcPts val="300"/>
-              </a:spcBef>
-              <a:spcAft>
-                <a:spcPts val="300"/>
-              </a:spcAft>
-              <a:buSzPct val="90000"/>
-              <a:buFont typeface="Wingdings" pitchFamily="2" charset="2"/>
-              <a:buChar char=""/>
-            </a:pPr>
-            <a:r>
-              <a:rPr sz="1200" b="1">
-                <a:solidFill>
-                  <a:srgbClr val="000000"/>
-                </a:solidFill>
-                <a:latin typeface="맑은 고딕"/>
-                <a:ea typeface="맑은 고딕"/>
-              </a:rPr>
-              <a:t>비용</a:t>
-            </a:r>
-            <a:r>
-              <a:rPr sz="1200" b="0">
-                <a:solidFill>
-                  <a:srgbClr val="000000"/>
-                </a:solidFill>
-                <a:latin typeface="맑은 고딕"/>
-                <a:ea typeface="맑은 고딕"/>
-              </a:rPr>
-              <a:t> —</a:t>
-            </a:r>
-            <a:r>
-              <a:rPr sz="1000" b="0">
-                <a:solidFill>
-                  <a:srgbClr val="000000"/>
-                </a:solidFill>
-                <a:latin typeface="맑은 고딕"/>
-                <a:ea typeface="맑은 고딕"/>
-              </a:rPr>
-              <a:t> 나누면 해지와 배송 요청의 경합</a:t>
-            </a:r>
-            <a:r>
-              <a:rPr sz="800" b="0">
-                <a:solidFill>
-                  <a:srgbClr val="000000"/>
-                </a:solidFill>
-                <a:latin typeface="맑은 고딕"/>
-                <a:ea typeface="맑은 고딕"/>
-              </a:rPr>
-              <a:t>(실습 12)</a:t>
-            </a:r>
-            <a:r>
-              <a:rPr sz="1000" b="0">
-                <a:solidFill>
-                  <a:srgbClr val="000000"/>
-                </a:solidFill>
-                <a:latin typeface="맑은 고딕"/>
-                <a:ea typeface="맑은 고딕"/>
-              </a:rPr>
-              <a:t>이 원격 호출이 된다.</a:t>
-            </a:r>
-          </a:p>
-          <a:p>
-            <a:pPr lvl="2" marL="228600" indent="-182880">
-              <a:spcBef>
-                <a:spcPts val="300"/>
-              </a:spcBef>
-              <a:spcAft>
-                <a:spcPts val="300"/>
-              </a:spcAft>
-              <a:buSzPct val="90000"/>
-              <a:buFont typeface="Wingdings" pitchFamily="2" charset="2"/>
-              <a:buChar char=""/>
-            </a:pPr>
-            <a:r>
-              <a:rPr sz="1400" b="1">
-                <a:solidFill>
-                  <a:srgbClr val="000000"/>
-                </a:solidFill>
-                <a:latin typeface="맑은 고딕"/>
-                <a:ea typeface="맑은 고딕"/>
-              </a:rPr>
-              <a:t>다시 열 조건</a:t>
-            </a:r>
-          </a:p>
-          <a:p>
-            <a:pPr lvl="3" marL="457200" indent="-182880">
-              <a:spcBef>
-                <a:spcPts val="300"/>
-              </a:spcBef>
-              <a:spcAft>
-                <a:spcPts val="300"/>
-              </a:spcAft>
-              <a:buSzPct val="90000"/>
-              <a:buFont typeface="Wingdings" pitchFamily="2" charset="2"/>
-              <a:buChar char=""/>
-            </a:pPr>
-            <a:r>
-              <a:rPr sz="1200" b="1">
-                <a:solidFill>
-                  <a:srgbClr val="000000"/>
-                </a:solidFill>
-                <a:latin typeface="맑은 고딕"/>
-                <a:ea typeface="맑은 고딕"/>
-              </a:rPr>
-              <a:t>성능</a:t>
-            </a:r>
-            <a:r>
-              <a:rPr sz="1200" b="0">
-                <a:solidFill>
-                  <a:srgbClr val="000000"/>
-                </a:solidFill>
-                <a:latin typeface="맑은 고딕"/>
-                <a:ea typeface="맑은 고딕"/>
-              </a:rPr>
-              <a:t> —</a:t>
-            </a:r>
-            <a:r>
-              <a:rPr sz="1000" b="0">
-                <a:solidFill>
-                  <a:srgbClr val="000000"/>
-                </a:solidFill>
-                <a:latin typeface="맑은 고딕"/>
-                <a:ea typeface="맑은 고딕"/>
-              </a:rPr>
-              <a:t> 회차 청구가 시나리오의 2시간을 넘으면 청구를 분리한다.</a:t>
-            </a:r>
-          </a:p>
-        </p:txBody>
-      </p:sp>
-    </p:spTree>
-    <p:extLst>
-      <p:ext uri="{BB962C8B-B14F-4D97-AF65-F5344CB8AC3E}">
-        <p14:creationId xmlns:p14="http://schemas.microsoft.com/office/powerpoint/2010/main" val="3555436673"/>
       </p:ext>
     </p:extLst>
   </p:cSld>
@@ -22683,7 +22559,7 @@
                 <a:latin typeface="맑은 고딕"/>
                 <a:ea typeface="맑은 고딕"/>
               </a:rPr>
-              <a:t>28. 확장 보완 </a:t>
+              <a:t>서비스 분리 판단 </a:t>
             </a:r>
             <a:r>
               <a:rPr sz="1800" b="1">
@@ -22694,6 +22570,18 @@
                 <a:ea typeface="맑은 고딕"/>
               </a:rPr>
               <a:t>(안)</a:t>
+            </a:r>
+          </a:p>
+          <a:p>
+            <a:r>
+              <a:rPr sz="1100" b="1">
+                <a:solidFill>
+                  <a:srgbClr val="000000"/>
+                </a:solidFill>
+                <a:latin typeface="맑은 고딕"/>
+                <a:ea typeface="맑은 고딕"/>
+              </a:rPr>
+              <a:t>별첨. 실습 답</a:t>
             </a:r>
           </a:p>
         </p:txBody>
@@ -22755,8 +22643,8 @@
           <a:lstStyle/>
           <a:p>
             <a:r>
-              <a:rPr kumimoji="1" lang="en-US" altLang="ko-KR" sz="950" dirty="0" err="1"/>
-              <a:t>13. OOAD에서 전문영역으로 — Architecture · DDD · MSA</a:t>
+              <a:rPr kumimoji="1" lang="en-US" altLang="ko-KR" sz="900" dirty="0" err="1"/>
+              <a:t>별첨: 13. OOAD에서 전문영역으로 — Architecture · DDD · MSA</a:t>
             </a:r>
           </a:p>
         </p:txBody>
@@ -22858,17 +22746,7 @@
                 <a:latin typeface="맑은 고딕"/>
                 <a:ea typeface="맑은 고딕"/>
               </a:rPr>
-              <a:t>요구사항 명세서</a:t>
-            </a:r>
-            <a:r>
-              <a:rPr sz="1000" b="0">
-                <a:solidFill>
-                  <a:srgbClr val="000000"/>
-                </a:solidFill>
-                <a:latin typeface="맑은 고딕"/>
-                <a:ea typeface="맑은 고딕"/>
-              </a:rPr>
-              <a:t>(실습 1)</a:t>
+              <a:t>판단</a:t>
             </a:r>
           </a:p>
           <a:p>
@@ -22891,7 +22769,7 @@
                 <a:latin typeface="맑은 고딕"/>
                 <a:ea typeface="맑은 고딕"/>
               </a:rPr>
-              <a:t>새 비기능 요구</a:t>
+              <a:t>모놀리스 유지</a:t>
             </a:r>
             <a:r>
               <a:rPr sz="1200" b="0">
@@ -22911,83 +22789,7 @@
                 <a:latin typeface="맑은 고딕"/>
                 <a:ea typeface="맑은 고딕"/>
               </a:rPr>
-              <a:t> 회차 청구 성능 시나리오</a:t>
-            </a:r>
-          </a:p>
-          <a:p>
-            <a:pPr lvl="2" marL="228600" indent="-182880">
-              <a:spcBef>
-                <a:spcPts val="300"/>
-              </a:spcBef>
-              <a:spcAft>
-                <a:spcPts val="300"/>
-              </a:spcAft>
-              <a:buSzPct val="90000"/>
-              <a:buFont typeface="Wingdings" pitchFamily="2" charset="2"/>
-              <a:buChar char=""/>
-            </a:pPr>
-            <a:r>
-              <a:rPr sz="1400" b="1">
-                <a:solidFill>
-                  <a:srgbClr val="000000"/>
-                </a:solidFill>
-                <a:latin typeface="맑은 고딕"/>
-                <a:ea typeface="맑은 고딕"/>
-              </a:rPr>
-              <a:t>결정 기록</a:t>
-            </a:r>
-            <a:r>
-              <a:rPr sz="1000" b="0">
-                <a:solidFill>
-                  <a:srgbClr val="000000"/>
-                </a:solidFill>
-                <a:latin typeface="맑은 고딕"/>
-                <a:ea typeface="맑은 고딕"/>
-              </a:rPr>
-              <a:t>(실습 9)</a:t>
-            </a:r>
-          </a:p>
-          <a:p>
-            <a:pPr lvl="3" marL="457200" indent="-182880">
-              <a:spcBef>
-                <a:spcPts val="300"/>
-              </a:spcBef>
-              <a:spcAft>
-                <a:spcPts val="300"/>
-              </a:spcAft>
-              <a:buSzPct val="90000"/>
-              <a:buFont typeface="Wingdings" pitchFamily="2" charset="2"/>
-              <a:buChar char=""/>
-            </a:pPr>
-            <a:r>
-              <a:rPr sz="1200" b="1">
-                <a:solidFill>
-                  <a:srgbClr val="000000"/>
-                </a:solidFill>
-                <a:latin typeface="맑은 고딕"/>
-                <a:ea typeface="맑은 고딕"/>
-              </a:rPr>
-              <a:t>새 기록</a:t>
-            </a:r>
-            <a:r>
-              <a:rPr sz="1200" b="0">
-                <a:solidFill>
-                  <a:srgbClr val="000000"/>
-                </a:solidFill>
-                <a:latin typeface="맑은 고딕"/>
-                <a:ea typeface="맑은 고딕"/>
-              </a:rPr>
-              <a:t> —</a:t>
-            </a:r>
-            <a:r>
-              <a:rPr sz="1000" b="0">
-                <a:solidFill>
-                  <a:srgbClr val="000000"/>
-                </a:solidFill>
-                <a:latin typeface="맑은 고딕"/>
-                <a:ea typeface="맑은 고딕"/>
-              </a:rPr>
-              <a:t> 모놀리스 유지와 다시 열 조건</a:t>
+              <a:t> 팀 하나, 업무 규칙이 회차 상태에 모여 있다.</a:t>
             </a:r>
           </a:p>
         </p:txBody>
@@ -23037,7 +22839,7 @@
                 <a:latin typeface="맑은 고딕"/>
                 <a:ea typeface="맑은 고딕"/>
               </a:rPr>
-              <a:t>전문영역의 눈으로 찾은 것은 </a:t>
+              <a:t>정기배송은 지금 </a:t>
             </a:r>
             <a:r>
               <a:rPr sz="1400" b="1">
@@ -23047,7 +22849,7 @@
                 <a:latin typeface="맑은 고딕"/>
                 <a:ea typeface="맑은 고딕"/>
               </a:rPr>
-              <a:t>후속 작업에 영향을 미치는 경우에만</a:t>
+              <a:t>서비스로 나누지 않는다</a:t>
             </a:r>
             <a:r>
               <a:rPr sz="1400" b="0">
@@ -23057,7 +22859,7 @@
                 <a:latin typeface="맑은 고딕"/>
                 <a:ea typeface="맑은 고딕"/>
               </a:rPr>
-              <a:t> 이전 산출물에 반영한다.</a:t>
+              <a:t>. 모듈 경계를 유지하고, 나눌 조건을 결정 기록에 둔다.</a:t>
             </a:r>
           </a:p>
         </p:txBody>
@@ -23109,17 +22911,7 @@
                 <a:latin typeface="맑은 고딕"/>
                 <a:ea typeface="맑은 고딕"/>
               </a:rPr>
-              <a:t>용어집</a:t>
-            </a:r>
-            <a:r>
-              <a:rPr sz="1000" b="0">
-                <a:solidFill>
-                  <a:srgbClr val="000000"/>
-                </a:solidFill>
-                <a:latin typeface="맑은 고딕"/>
-                <a:ea typeface="맑은 고딕"/>
-              </a:rPr>
-              <a:t>(실습 2)</a:t>
+              <a:t>근거</a:t>
             </a:r>
           </a:p>
           <a:p>
@@ -23142,7 +22934,7 @@
                 <a:latin typeface="맑은 고딕"/>
                 <a:ea typeface="맑은 고딕"/>
               </a:rPr>
-              <a:t>맥락 표시</a:t>
+              <a:t>evidence</a:t>
             </a:r>
             <a:r>
               <a:rPr sz="1200" b="0">
@@ -23162,7 +22954,70 @@
                 <a:latin typeface="맑은 고딕"/>
                 <a:ea typeface="맑은 고딕"/>
               </a:rPr>
-              <a:t> 용어집은 정기배송 맥락의 언어임을 밝힌다</a:t>
+              <a:t> 변경이 연동에서 멈췄다. 업무 경계 안의 변경은 아직 적다.</a:t>
+            </a:r>
+          </a:p>
+          <a:p>
+            <a:pPr lvl="3" marL="457200" indent="-182880">
+              <a:spcBef>
+                <a:spcPts val="300"/>
+              </a:spcBef>
+              <a:spcAft>
+                <a:spcPts val="300"/>
+              </a:spcAft>
+              <a:buSzPct val="90000"/>
+              <a:buFont typeface="Wingdings" pitchFamily="2" charset="2"/>
+              <a:buChar char=""/>
+            </a:pPr>
+            <a:r>
+              <a:rPr sz="1200" b="1">
+                <a:solidFill>
+                  <a:srgbClr val="000000"/>
+                </a:solidFill>
+                <a:latin typeface="맑은 고딕"/>
+                <a:ea typeface="맑은 고딕"/>
+              </a:rPr>
+              <a:t>비용</a:t>
+            </a:r>
+            <a:r>
+              <a:rPr sz="1200" b="0">
+                <a:solidFill>
+                  <a:srgbClr val="000000"/>
+                </a:solidFill>
+                <a:latin typeface="맑은 고딕"/>
+                <a:ea typeface="맑은 고딕"/>
+              </a:rPr>
+              <a:t> —</a:t>
+            </a:r>
+            <a:r>
+              <a:rPr sz="1000" b="0">
+                <a:solidFill>
+                  <a:srgbClr val="000000"/>
+                </a:solidFill>
+                <a:latin typeface="맑은 고딕"/>
+                <a:ea typeface="맑은 고딕"/>
+              </a:rPr>
+              <a:t> 나누면 해지와 배송 요청의 경합</a:t>
+            </a:r>
+            <a:r>
+              <a:rPr sz="800" b="0">
+                <a:solidFill>
+                  <a:srgbClr val="000000"/>
+                </a:solidFill>
+                <a:latin typeface="맑은 고딕"/>
+                <a:ea typeface="맑은 고딕"/>
+              </a:rPr>
+              <a:t>(실습 12)</a:t>
+            </a:r>
+            <a:r>
+              <a:rPr sz="1000" b="0">
+                <a:solidFill>
+                  <a:srgbClr val="000000"/>
+                </a:solidFill>
+                <a:latin typeface="맑은 고딕"/>
+                <a:ea typeface="맑은 고딕"/>
+              </a:rPr>
+              <a:t>이 원격 호출이 된다.</a:t>
             </a:r>
           </a:p>
           <a:p>
@@ -23185,7 +23040,7 @@
                 <a:latin typeface="맑은 고딕"/>
                 <a:ea typeface="맑은 고딕"/>
               </a:rPr>
-              <a:t>※ 현행화 기준</a:t>
+              <a:t>다시 열 조건</a:t>
             </a:r>
           </a:p>
           <a:p>
@@ -23208,7 +23063,7 @@
                 <a:latin typeface="맑은 고딕"/>
                 <a:ea typeface="맑은 고딕"/>
               </a:rPr>
-              <a:t>반영</a:t>
+              <a:t>성능</a:t>
             </a:r>
             <a:r>
               <a:rPr sz="1200" b="0">
@@ -23228,50 +23083,7 @@
                 <a:latin typeface="맑은 고딕"/>
                 <a:ea typeface="맑은 고딕"/>
               </a:rPr>
-              <a:t> 비기능 요구, 결정 기록, 용어집의 맥락.</a:t>
-            </a:r>
-          </a:p>
-          <a:p>
-            <a:pPr lvl="3" marL="457200" indent="-182880">
-              <a:spcBef>
-                <a:spcPts val="300"/>
-              </a:spcBef>
-              <a:spcAft>
-                <a:spcPts val="300"/>
-              </a:spcAft>
-              <a:buSzPct val="90000"/>
-              <a:buFont typeface="Wingdings" pitchFamily="2" charset="2"/>
-              <a:buChar char=""/>
-            </a:pPr>
-            <a:r>
-              <a:rPr sz="1200" b="1">
-                <a:solidFill>
-                  <a:srgbClr val="000000"/>
-                </a:solidFill>
-                <a:latin typeface="맑은 고딕"/>
-                <a:ea typeface="맑은 고딕"/>
-              </a:rPr>
-              <a:t>기록만</a:t>
-            </a:r>
-            <a:r>
-              <a:rPr sz="1200" b="0">
-                <a:solidFill>
-                  <a:srgbClr val="000000"/>
-                </a:solidFill>
-                <a:latin typeface="맑은 고딕"/>
-                <a:ea typeface="맑은 고딕"/>
-              </a:rPr>
-              <a:t> —</a:t>
-            </a:r>
-            <a:r>
-              <a:rPr sz="1000" b="0">
-                <a:solidFill>
-                  <a:srgbClr val="000000"/>
-                </a:solidFill>
-                <a:latin typeface="맑은 고딕"/>
-                <a:ea typeface="맑은 고딕"/>
-              </a:rPr>
-              <a:t> 맥락 지도.</a:t>
+              <a:t> 회차 청구가 시나리오의 2시간을 넘으면 청구를 분리한다.</a:t>
             </a:r>
           </a:p>
         </p:txBody>
@@ -24564,7 +24376,29 @@
                 <a:latin typeface="맑은 고딕"/>
                 <a:ea typeface="맑은 고딕"/>
               </a:rPr>
-              <a:t>29. 요약</a:t>
+              <a:t>확장 보완 </a:t>
+            </a:r>
+            <a:r>
+              <a:rPr sz="1800" b="1">
+                <a:solidFill>
+                  <a:srgbClr val="000000"/>
+                </a:solidFill>
+                <a:latin typeface="맑은 고딕"/>
+                <a:ea typeface="맑은 고딕"/>
+              </a:rPr>
+              <a:t>(안)</a:t>
+            </a:r>
+          </a:p>
+          <a:p>
+            <a:r>
+              <a:rPr sz="1100" b="1">
+                <a:solidFill>
+                  <a:srgbClr val="000000"/>
+                </a:solidFill>
+                <a:latin typeface="맑은 고딕"/>
+                <a:ea typeface="맑은 고딕"/>
+              </a:rPr>
+              <a:t>별첨. 실습 답</a:t>
             </a:r>
           </a:p>
         </p:txBody>
@@ -24626,8 +24460,8 @@
           <a:lstStyle/>
           <a:p>
             <a:r>
-              <a:rPr kumimoji="1" lang="en-US" altLang="ko-KR" sz="950" dirty="0" err="1"/>
-              <a:t>13. OOAD에서 전문영역으로 — Architecture · DDD · MSA</a:t>
+              <a:rPr kumimoji="1" lang="en-US" altLang="ko-KR" sz="900" dirty="0" err="1"/>
+              <a:t>별첨: 13. OOAD에서 전문영역으로 — Architecture · DDD · MSA</a:t>
             </a:r>
           </a:p>
         </p:txBody>
@@ -24698,270 +24532,391 @@
             <p:ph idx="1"/>
           </p:nvPr>
         </p:nvSpPr>
-        <p:spPr/>
+        <p:spPr>
+          <a:xfrm>
+            <a:off x="233172" y="1414318"/>
+            <a:ext cx="4338828" cy="4898147"/>
+          </a:xfrm>
+        </p:spPr>
         <p:txBody>
           <a:bodyPr>
             <a:normAutofit/>
           </a:bodyPr>
           <a:lstStyle/>
           <a:p>
-            <a:pPr marL="0" indent="0">
+            <a:pPr lvl="2" marL="228600" indent="-182880">
               <a:spcBef>
-                <a:spcPts val="600"/>
+                <a:spcPts val="300"/>
               </a:spcBef>
               <a:spcAft>
-                <a:spcPts val="600"/>
-              </a:spcAft>
-              <a:buNone/>
-            </a:pPr>
-            <a:r>
-              <a:rPr sz="1800" b="0">
-                <a:solidFill>
-                  <a:srgbClr val="000000"/>
-                </a:solidFill>
-                <a:latin typeface="맑은 고딕"/>
-                <a:ea typeface="맑은 고딕"/>
-              </a:rPr>
-              <a:t>이 세션은 OOAD의 판단과 </a:t>
-            </a:r>
-            <a:r>
-              <a:rPr sz="1800" b="1">
-                <a:solidFill>
-                  <a:srgbClr val="000000"/>
-                </a:solidFill>
-                <a:latin typeface="맑은 고딕"/>
-                <a:ea typeface="맑은 고딕"/>
-              </a:rPr>
-              <a:t>전문영역이 더 소유하는 판단</a:t>
-            </a:r>
-            <a:r>
-              <a:rPr sz="1800" b="0">
-                <a:solidFill>
-                  <a:srgbClr val="000000"/>
-                </a:solidFill>
-                <a:latin typeface="맑은 고딕"/>
-                <a:ea typeface="맑은 고딕"/>
-              </a:rPr>
-              <a:t>을 구분했다.</a:t>
-            </a:r>
-          </a:p>
-          <a:p>
-            <a:pPr marL="342900" indent="0">
-              <a:spcBef>
-                <a:spcPts val="600"/>
-              </a:spcBef>
-              <a:spcAft>
-                <a:spcPts val="600"/>
-              </a:spcAft>
-              <a:buNone/>
-            </a:pPr>
-            <a:r>
-              <a:rPr sz="1800" b="1">
-                <a:solidFill>
-                  <a:srgbClr val="000000"/>
-                </a:solidFill>
-                <a:latin typeface="맑은 고딕"/>
-                <a:ea typeface="맑은 고딕"/>
-              </a:rPr>
-              <a:t>OOAD에서 전문영역으로의 핵심</a:t>
-            </a:r>
-          </a:p>
-          <a:p>
-            <a:pPr lvl="2" marL="723900" indent="-368300">
-              <a:spcBef>
-                <a:spcPts val="600"/>
-              </a:spcBef>
-              <a:spcAft>
-                <a:spcPts val="600"/>
+                <a:spcPts val="300"/>
               </a:spcAft>
               <a:buSzPct val="90000"/>
               <a:buFont typeface="Wingdings" pitchFamily="2" charset="2"/>
               <a:buChar char=""/>
             </a:pPr>
             <a:r>
-              <a:rPr sz="1800" b="1">
-                <a:solidFill>
-                  <a:srgbClr val="000000"/>
-                </a:solidFill>
-                <a:latin typeface="맑은 고딕"/>
-                <a:ea typeface="맑은 고딕"/>
-              </a:rPr>
-              <a:t>원칙</a:t>
-            </a:r>
-            <a:r>
-              <a:rPr sz="1800" b="0">
-                <a:solidFill>
-                  <a:srgbClr val="000000"/>
-                </a:solidFill>
-                <a:latin typeface="맑은 고딕"/>
-                <a:ea typeface="맑은 고딕"/>
-              </a:rPr>
-              <a:t> —</a:t>
-            </a:r>
-            <a:r>
-              <a:rPr sz="1600" b="0">
-                <a:solidFill>
-                  <a:srgbClr val="000000"/>
-                </a:solidFill>
-                <a:latin typeface="맑은 고딕"/>
-                <a:ea typeface="맑은 고딕"/>
-              </a:rPr>
-              <a:t> OOAD는 전문영역을 대체하지 않고, 문제 이해와 설계 판단의 공통 기반이다</a:t>
-            </a:r>
-          </a:p>
-          <a:p>
-            <a:pPr lvl="2" marL="723900" indent="-368300">
+              <a:rPr sz="1400" b="1">
+                <a:solidFill>
+                  <a:srgbClr val="000000"/>
+                </a:solidFill>
+                <a:latin typeface="맑은 고딕"/>
+                <a:ea typeface="맑은 고딕"/>
+              </a:rPr>
+              <a:t>요구사항 정의서</a:t>
+            </a:r>
+            <a:r>
+              <a:rPr sz="1000" b="0">
+                <a:solidFill>
+                  <a:srgbClr val="000000"/>
+                </a:solidFill>
+                <a:latin typeface="맑은 고딕"/>
+                <a:ea typeface="맑은 고딕"/>
+              </a:rPr>
+              <a:t>(실습 1)</a:t>
+            </a:r>
+          </a:p>
+          <a:p>
+            <a:pPr lvl="3" marL="457200" indent="-182880">
               <a:spcBef>
-                <a:spcPts val="600"/>
+                <a:spcPts val="300"/>
               </a:spcBef>
               <a:spcAft>
-                <a:spcPts val="600"/>
+                <a:spcPts val="300"/>
+              </a:spcAft>
+              <a:buSzPct val="90000"/>
+              <a:buFont typeface="Wingdings" pitchFamily="2" charset="2"/>
+              <a:buChar char=""/>
+            </a:pPr>
+            <a:r>
+              <a:rPr sz="1200" b="1">
+                <a:solidFill>
+                  <a:srgbClr val="000000"/>
+                </a:solidFill>
+                <a:latin typeface="맑은 고딕"/>
+                <a:ea typeface="맑은 고딕"/>
+              </a:rPr>
+              <a:t>새 비기능 요구</a:t>
+            </a:r>
+            <a:r>
+              <a:rPr sz="1200" b="0">
+                <a:solidFill>
+                  <a:srgbClr val="000000"/>
+                </a:solidFill>
+                <a:latin typeface="맑은 고딕"/>
+                <a:ea typeface="맑은 고딕"/>
+              </a:rPr>
+              <a:t> —</a:t>
+            </a:r>
+            <a:r>
+              <a:rPr sz="1000" b="0">
+                <a:solidFill>
+                  <a:srgbClr val="000000"/>
+                </a:solidFill>
+                <a:latin typeface="맑은 고딕"/>
+                <a:ea typeface="맑은 고딕"/>
+              </a:rPr>
+              <a:t> 회차 청구 성능 시나리오</a:t>
+            </a:r>
+          </a:p>
+          <a:p>
+            <a:pPr lvl="2" marL="228600" indent="-182880">
+              <a:spcBef>
+                <a:spcPts val="300"/>
+              </a:spcBef>
+              <a:spcAft>
+                <a:spcPts val="300"/>
               </a:spcAft>
               <a:buSzPct val="90000"/>
               <a:buFont typeface="Wingdings" pitchFamily="2" charset="2"/>
               <a:buChar char=""/>
             </a:pPr>
             <a:r>
-              <a:rPr sz="1800" b="1">
-                <a:solidFill>
-                  <a:srgbClr val="000000"/>
-                </a:solidFill>
-                <a:latin typeface="맑은 고딕"/>
-                <a:ea typeface="맑은 고딕"/>
-              </a:rPr>
-              <a:t>Architecture</a:t>
-            </a:r>
-            <a:r>
-              <a:rPr sz="1800" b="0">
-                <a:solidFill>
-                  <a:srgbClr val="000000"/>
-                </a:solidFill>
-                <a:latin typeface="맑은 고딕"/>
-                <a:ea typeface="맑은 고딕"/>
-              </a:rPr>
-              <a:t> —</a:t>
-            </a:r>
-            <a:r>
-              <a:rPr sz="1600" b="0">
-                <a:solidFill>
-                  <a:srgbClr val="000000"/>
-                </a:solidFill>
-                <a:latin typeface="맑은 고딕"/>
-                <a:ea typeface="맑은 고딕"/>
-              </a:rPr>
-              <a:t> 품질 속성 시나리오와 시스템 수준의 절충, 바꾸기 어려운 결정</a:t>
-            </a:r>
-          </a:p>
-          <a:p>
-            <a:pPr lvl="2" marL="723900" indent="-368300">
+              <a:rPr sz="1400" b="1">
+                <a:solidFill>
+                  <a:srgbClr val="000000"/>
+                </a:solidFill>
+                <a:latin typeface="맑은 고딕"/>
+                <a:ea typeface="맑은 고딕"/>
+              </a:rPr>
+              <a:t>결정 기록</a:t>
+            </a:r>
+            <a:r>
+              <a:rPr sz="1000" b="0">
+                <a:solidFill>
+                  <a:srgbClr val="000000"/>
+                </a:solidFill>
+                <a:latin typeface="맑은 고딕"/>
+                <a:ea typeface="맑은 고딕"/>
+              </a:rPr>
+              <a:t>(실습 9)</a:t>
+            </a:r>
+          </a:p>
+          <a:p>
+            <a:pPr lvl="3" marL="457200" indent="-182880">
               <a:spcBef>
-                <a:spcPts val="600"/>
+                <a:spcPts val="300"/>
               </a:spcBef>
               <a:spcAft>
-                <a:spcPts val="600"/>
+                <a:spcPts val="300"/>
+              </a:spcAft>
+              <a:buSzPct val="90000"/>
+              <a:buFont typeface="Wingdings" pitchFamily="2" charset="2"/>
+              <a:buChar char=""/>
+            </a:pPr>
+            <a:r>
+              <a:rPr sz="1200" b="1">
+                <a:solidFill>
+                  <a:srgbClr val="000000"/>
+                </a:solidFill>
+                <a:latin typeface="맑은 고딕"/>
+                <a:ea typeface="맑은 고딕"/>
+              </a:rPr>
+              <a:t>새 기록</a:t>
+            </a:r>
+            <a:r>
+              <a:rPr sz="1200" b="0">
+                <a:solidFill>
+                  <a:srgbClr val="000000"/>
+                </a:solidFill>
+                <a:latin typeface="맑은 고딕"/>
+                <a:ea typeface="맑은 고딕"/>
+              </a:rPr>
+              <a:t> —</a:t>
+            </a:r>
+            <a:r>
+              <a:rPr sz="1000" b="0">
+                <a:solidFill>
+                  <a:srgbClr val="000000"/>
+                </a:solidFill>
+                <a:latin typeface="맑은 고딕"/>
+                <a:ea typeface="맑은 고딕"/>
+              </a:rPr>
+              <a:t> 모놀리스 유지와 다시 열 조건</a:t>
+            </a:r>
+          </a:p>
+        </p:txBody>
+      </p:sp>
+      <p:sp>
+        <p:nvSpPr>
+          <p:cNvPr id="9" name="내용 개체 틀 7">
+            <a:extLst>
+              <a:ext uri="{FF2B5EF4-FFF2-40B4-BE49-F238E27FC236}">
+                <a16:creationId xmlns:a16="http://schemas.microsoft.com/office/drawing/2014/main" id="{BEBA2C4A-B0BF-F2E4-EA6E-614C99CBA184}"/>
+              </a:ext>
+            </a:extLst>
+          </p:cNvPr>
+          <p:cNvSpPr>
+            <a:spLocks noGrp="1"/>
+          </p:cNvSpPr>
+          <p:nvPr>
+            <p:ph idx="1"/>
+          </p:nvPr>
+        </p:nvSpPr>
+        <p:spPr>
+          <a:xfrm>
+            <a:off x="233172" y="960120"/>
+            <a:ext cx="8778240" cy="454198"/>
+          </a:xfrm>
+        </p:spPr>
+        <p:txBody>
+          <a:bodyPr>
+            <a:normAutofit/>
+          </a:bodyPr>
+          <a:lstStyle/>
+          <a:p>
+            <a:pPr marL="0" indent="0">
+              <a:spcBef>
+                <a:spcPts val="300"/>
+              </a:spcBef>
+              <a:spcAft>
+                <a:spcPts val="300"/>
+              </a:spcAft>
+              <a:buNone/>
+            </a:pPr>
+            <a:r>
+              <a:rPr sz="1400" b="0">
+                <a:solidFill>
+                  <a:srgbClr val="000000"/>
+                </a:solidFill>
+                <a:latin typeface="맑은 고딕"/>
+                <a:ea typeface="맑은 고딕"/>
+              </a:rPr>
+              <a:t>전문영역의 눈으로 찾은 것은 </a:t>
+            </a:r>
+            <a:r>
+              <a:rPr sz="1400" b="1">
+                <a:solidFill>
+                  <a:srgbClr val="000000"/>
+                </a:solidFill>
+                <a:latin typeface="맑은 고딕"/>
+                <a:ea typeface="맑은 고딕"/>
+              </a:rPr>
+              <a:t>후속 작업에 영향을 미치는 경우에만</a:t>
+            </a:r>
+            <a:r>
+              <a:rPr sz="1400" b="0">
+                <a:solidFill>
+                  <a:srgbClr val="000000"/>
+                </a:solidFill>
+                <a:latin typeface="맑은 고딕"/>
+                <a:ea typeface="맑은 고딕"/>
+              </a:rPr>
+              <a:t> 이전 산출물에 반영한다.</a:t>
+            </a:r>
+          </a:p>
+        </p:txBody>
+      </p:sp>
+      <p:sp>
+        <p:nvSpPr>
+          <p:cNvPr id="10" name="내용 개체 틀 7">
+            <a:extLst>
+              <a:ext uri="{FF2B5EF4-FFF2-40B4-BE49-F238E27FC236}">
+                <a16:creationId xmlns:a16="http://schemas.microsoft.com/office/drawing/2014/main" id="{BEBA2C4A-B0BF-F2E4-EA6E-614C99CBA184}"/>
+              </a:ext>
+            </a:extLst>
+          </p:cNvPr>
+          <p:cNvSpPr>
+            <a:spLocks noGrp="1"/>
+          </p:cNvSpPr>
+          <p:nvPr>
+            <p:ph idx="1"/>
+          </p:nvPr>
+        </p:nvSpPr>
+        <p:spPr>
+          <a:xfrm>
+            <a:off x="4572000" y="1414318"/>
+            <a:ext cx="4439412" cy="4898147"/>
+          </a:xfrm>
+        </p:spPr>
+        <p:txBody>
+          <a:bodyPr>
+            <a:normAutofit/>
+          </a:bodyPr>
+          <a:lstStyle/>
+          <a:p>
+            <a:pPr lvl="2" marL="228600" indent="-182880">
+              <a:spcBef>
+                <a:spcPts val="300"/>
+              </a:spcBef>
+              <a:spcAft>
+                <a:spcPts val="300"/>
               </a:spcAft>
               <a:buSzPct val="90000"/>
               <a:buFont typeface="Wingdings" pitchFamily="2" charset="2"/>
               <a:buChar char=""/>
             </a:pPr>
             <a:r>
-              <a:rPr sz="1800" b="1">
-                <a:solidFill>
-                  <a:srgbClr val="000000"/>
-                </a:solidFill>
-                <a:latin typeface="맑은 고딕"/>
-                <a:ea typeface="맑은 고딕"/>
-              </a:rPr>
-              <a:t>DDD</a:t>
-            </a:r>
-            <a:r>
-              <a:rPr sz="1800" b="0">
-                <a:solidFill>
-                  <a:srgbClr val="000000"/>
-                </a:solidFill>
-                <a:latin typeface="맑은 고딕"/>
-                <a:ea typeface="맑은 고딕"/>
-              </a:rPr>
-              <a:t> —</a:t>
-            </a:r>
-            <a:r>
-              <a:rPr sz="1600" b="0">
-                <a:solidFill>
-                  <a:srgbClr val="000000"/>
-                </a:solidFill>
-                <a:latin typeface="맑은 고딕"/>
-                <a:ea typeface="맑은 고딕"/>
-              </a:rPr>
-              <a:t> 맥락 안의 모델, 공통 언어의 정제, 핵심 도메인</a:t>
-            </a:r>
-          </a:p>
-          <a:p>
-            <a:pPr lvl="2" marL="723900" indent="-368300">
+              <a:rPr sz="1400" b="1">
+                <a:solidFill>
+                  <a:srgbClr val="000000"/>
+                </a:solidFill>
+                <a:latin typeface="맑은 고딕"/>
+                <a:ea typeface="맑은 고딕"/>
+              </a:rPr>
+              <a:t>용어집</a:t>
+            </a:r>
+            <a:r>
+              <a:rPr sz="1000" b="0">
+                <a:solidFill>
+                  <a:srgbClr val="000000"/>
+                </a:solidFill>
+                <a:latin typeface="맑은 고딕"/>
+                <a:ea typeface="맑은 고딕"/>
+              </a:rPr>
+              <a:t>(실습 2)</a:t>
+            </a:r>
+          </a:p>
+          <a:p>
+            <a:pPr lvl="3" marL="457200" indent="-182880">
               <a:spcBef>
-                <a:spcPts val="600"/>
+                <a:spcPts val="300"/>
               </a:spcBef>
               <a:spcAft>
-                <a:spcPts val="600"/>
+                <a:spcPts val="300"/>
+              </a:spcAft>
+              <a:buSzPct val="90000"/>
+              <a:buFont typeface="Wingdings" pitchFamily="2" charset="2"/>
+              <a:buChar char=""/>
+            </a:pPr>
+            <a:r>
+              <a:rPr sz="1200" b="1">
+                <a:solidFill>
+                  <a:srgbClr val="000000"/>
+                </a:solidFill>
+                <a:latin typeface="맑은 고딕"/>
+                <a:ea typeface="맑은 고딕"/>
+              </a:rPr>
+              <a:t>맥락 표시</a:t>
+            </a:r>
+            <a:r>
+              <a:rPr sz="1200" b="0">
+                <a:solidFill>
+                  <a:srgbClr val="000000"/>
+                </a:solidFill>
+                <a:latin typeface="맑은 고딕"/>
+                <a:ea typeface="맑은 고딕"/>
+              </a:rPr>
+              <a:t> —</a:t>
+            </a:r>
+            <a:r>
+              <a:rPr sz="1000" b="0">
+                <a:solidFill>
+                  <a:srgbClr val="000000"/>
+                </a:solidFill>
+                <a:latin typeface="맑은 고딕"/>
+                <a:ea typeface="맑은 고딕"/>
+              </a:rPr>
+              <a:t> 용어집은 정기배송 맥락의 언어임을 밝힌다</a:t>
+            </a:r>
+          </a:p>
+          <a:p>
+            <a:pPr lvl="2" marL="228600" indent="-182880">
+              <a:spcBef>
+                <a:spcPts val="300"/>
+              </a:spcBef>
+              <a:spcAft>
+                <a:spcPts val="300"/>
               </a:spcAft>
               <a:buSzPct val="90000"/>
               <a:buFont typeface="Wingdings" pitchFamily="2" charset="2"/>
               <a:buChar char=""/>
             </a:pPr>
             <a:r>
-              <a:rPr sz="1800" b="1">
-                <a:solidFill>
-                  <a:srgbClr val="000000"/>
-                </a:solidFill>
-                <a:latin typeface="맑은 고딕"/>
-                <a:ea typeface="맑은 고딕"/>
-              </a:rPr>
-              <a:t>MSA</a:t>
-            </a:r>
-            <a:r>
-              <a:rPr sz="1800" b="0">
-                <a:solidFill>
-                  <a:srgbClr val="000000"/>
-                </a:solidFill>
-                <a:latin typeface="맑은 고딕"/>
-                <a:ea typeface="맑은 고딕"/>
-              </a:rPr>
-              <a:t> —</a:t>
-            </a:r>
-            <a:r>
-              <a:rPr sz="1600" b="0">
-                <a:solidFill>
-                  <a:srgbClr val="000000"/>
-                </a:solidFill>
-                <a:latin typeface="맑은 고딕"/>
-                <a:ea typeface="맑은 고딕"/>
-              </a:rPr>
-              <a:t> 원격 호출의 실패, 검증된 경계, 조직과 설계</a:t>
-            </a:r>
-          </a:p>
-          <a:p>
-            <a:pPr lvl="2" marL="723900" indent="-368300">
+              <a:rPr sz="1400" b="1">
+                <a:solidFill>
+                  <a:srgbClr val="000000"/>
+                </a:solidFill>
+                <a:latin typeface="맑은 고딕"/>
+                <a:ea typeface="맑은 고딕"/>
+              </a:rPr>
+              <a:t>※ 현행화 기준</a:t>
+            </a:r>
+          </a:p>
+          <a:p>
+            <a:pPr lvl="3" marL="457200" indent="-182880">
               <a:spcBef>
-                <a:spcPts val="600"/>
+                <a:spcPts val="300"/>
               </a:spcBef>
               <a:spcAft>
-                <a:spcPts val="600"/>
+                <a:spcPts val="300"/>
               </a:spcAft>
               <a:buSzPct val="90000"/>
               <a:buFont typeface="Wingdings" pitchFamily="2" charset="2"/>
-              <a:buChar char=""/>
+              <a:buChar char=""/>
             </a:pPr>
             <a:r>
-              <a:rPr sz="1800" b="1">
-                <a:solidFill>
-                  <a:srgbClr val="000000"/>
-                </a:solidFill>
-                <a:latin typeface="맑은 고딕"/>
-                <a:ea typeface="맑은 고딕"/>
-              </a:rPr>
-              <a:t>잘못된 관행</a:t>
-            </a:r>
-            <a:r>
-              <a:rPr sz="1800" b="0">
+              <a:rPr sz="1200" b="1">
+                <a:solidFill>
+                  <a:srgbClr val="000000"/>
+                </a:solidFill>
+                <a:latin typeface="맑은 고딕"/>
+                <a:ea typeface="맑은 고딕"/>
+              </a:rPr>
+              <a:t>반영</a:t>
+            </a:r>
+            <a:r>
+              <a:rPr sz="1200" b="0">
                 <a:solidFill>
                   <a:srgbClr val="000000"/>
                 </a:solidFill>
@@ -24971,88 +24926,57 @@
               <a:t> —</a:t>
             </a:r>
             <a:r>
-              <a:rPr sz="1600" b="0">
-                <a:solidFill>
-                  <a:srgbClr val="000000"/>
-                </a:solidFill>
-                <a:latin typeface="맑은 고딕"/>
-                <a:ea typeface="맑은 고딕"/>
-              </a:rPr>
-              <a:t> 서비스부터 나누기, 하나의 전사 모델, 도메인 없는 아키텍처</a:t>
-            </a:r>
-          </a:p>
-          <a:p>
-            <a:pPr marL="342900" indent="0">
+              <a:rPr sz="1000" b="0">
+                <a:solidFill>
+                  <a:srgbClr val="000000"/>
+                </a:solidFill>
+                <a:latin typeface="맑은 고딕"/>
+                <a:ea typeface="맑은 고딕"/>
+              </a:rPr>
+              <a:t> 비기능 요구, 결정 기록, 용어집의 맥락.</a:t>
+            </a:r>
+          </a:p>
+          <a:p>
+            <a:pPr lvl="3" marL="457200" indent="-182880">
               <a:spcBef>
-                <a:spcPts val="600"/>
+                <a:spcPts val="300"/>
               </a:spcBef>
               <a:spcAft>
-                <a:spcPts val="600"/>
-              </a:spcAft>
-              <a:buNone/>
-            </a:pPr>
-            <a:r>
-              <a:rPr sz="1800" b="1">
-                <a:solidFill>
-                  <a:srgbClr val="000000"/>
-                </a:solidFill>
-                <a:latin typeface="맑은 고딕"/>
-                <a:ea typeface="맑은 고딕"/>
-              </a:rPr>
-              <a:t>다음 세션</a:t>
-            </a:r>
-          </a:p>
-          <a:p>
-            <a:pPr lvl="2" marL="723900" indent="-368300">
-              <a:spcBef>
-                <a:spcPts val="600"/>
-              </a:spcBef>
-              <a:spcAft>
-                <a:spcPts val="600"/>
+                <a:spcPts val="300"/>
               </a:spcAft>
               <a:buSzPct val="90000"/>
               <a:buFont typeface="Wingdings" pitchFamily="2" charset="2"/>
-              <a:buChar char=""/>
+              <a:buChar char=""/>
             </a:pPr>
             <a:r>
-              <a:rPr sz="1800" b="0">
-                <a:solidFill>
-                  <a:srgbClr val="000000"/>
-                </a:solidFill>
-                <a:latin typeface="맑은 고딕"/>
-                <a:ea typeface="맑은 고딕"/>
-              </a:rPr>
-              <a:t>"</a:t>
-            </a:r>
-            <a:r>
-              <a:rPr sz="1800" b="1">
-                <a:solidFill>
-                  <a:srgbClr val="000000"/>
-                </a:solidFill>
-                <a:latin typeface="맑은 고딕"/>
-                <a:ea typeface="맑은 고딕"/>
-              </a:rPr>
-              <a:t>14. AI-native SW공학</a:t>
-            </a:r>
-            <a:r>
-              <a:rPr sz="1800" b="0">
-                <a:solidFill>
-                  <a:srgbClr val="000000"/>
-                </a:solidFill>
-                <a:latin typeface="맑은 고딕"/>
-                <a:ea typeface="맑은 고딕"/>
-              </a:rPr>
-              <a:t>" —</a:t>
-            </a:r>
-            <a:r>
-              <a:rPr sz="1600" b="0">
-                <a:solidFill>
-                  <a:srgbClr val="000000"/>
-                </a:solidFill>
-                <a:latin typeface="맑은 고딕"/>
-                <a:ea typeface="맑은 고딕"/>
-              </a:rPr>
-              <a:t> OOAD의 판단을 Human과 Agent가 어떻게 나누고 검증하는지 연결한다.</a:t>
+              <a:rPr sz="1200" b="1">
+                <a:solidFill>
+                  <a:srgbClr val="000000"/>
+                </a:solidFill>
+                <a:latin typeface="맑은 고딕"/>
+                <a:ea typeface="맑은 고딕"/>
+              </a:rPr>
+              <a:t>기록만</a:t>
+            </a:r>
+            <a:r>
+              <a:rPr sz="1200" b="0">
+                <a:solidFill>
+                  <a:srgbClr val="000000"/>
+                </a:solidFill>
+                <a:latin typeface="맑은 고딕"/>
+                <a:ea typeface="맑은 고딕"/>
+              </a:rPr>
+              <a:t> —</a:t>
+            </a:r>
+            <a:r>
+              <a:rPr sz="1000" b="0">
+                <a:solidFill>
+                  <a:srgbClr val="000000"/>
+                </a:solidFill>
+                <a:latin typeface="맑은 고딕"/>
+                <a:ea typeface="맑은 고딕"/>
+              </a:rPr>
+              <a:t> 맥락 지도.</a:t>
             </a:r>
           </a:p>
         </p:txBody>

--- a/courses/ooad/sessions/s13.pptx
+++ b/courses/ooad/sessions/s13.pptx
@@ -567,7 +567,7 @@
             <a:pPr lvl="0"/>
             <a:r>
               <a:rPr lang="ko-KR" sz="1200"/>
-              <a:t>"10. 기술 제약과 도메인 의미 보존"의 도메인 격리 구조를 포트와 어댑터(육각형 아키텍처)라 부른다고 예고했다. 이름이 붙은 아키텍처 스타일은 이처럼 OOAD의 판단을 패턴으로 굳힌 것이다.</a:t>
+              <a:t>"세션 10. 기술 제약과 도메인 의미 보존"의 도메인 격리 구조를 포트와 어댑터(육각형 아키텍처)라 부른다고 예고했다. 이름이 붙은 아키텍처 스타일은 이처럼 OOAD의 판단을 패턴으로 굳힌 것이다.</a:t>
             </a:r>
           </a:p>
         </p:txBody>
@@ -696,7 +696,7 @@
             <a:pPr lvl="0"/>
             <a:r>
               <a:rPr lang="ko-KR" sz="1200"/>
-              <a:t>"10. 기술 제약과 도메인 의미 보존"에서 인용한 Evans의 ACL 정의와 같은 구조다. 이 과정의 연동은 처음부터 ACL이었다.</a:t>
+              <a:t>"세션 10. 기술 제약과 도메인 의미 보존"에서 인용한 Evans의 ACL 정의와 같은 구조다. 이 과정의 연동은 처음부터 ACL이었다.</a:t>
             </a:r>
           </a:p>
           <a:p>
@@ -771,7 +771,7 @@
             <a:pPr lvl="0"/>
             <a:r>
               <a:rPr lang="ko-KR" sz="1200"/>
-              <a:t>"02. 요구 분석과 유스케이스"의 용어집 노트에서 예고한 관계가 이것이다 — 용어집은 공통 언어를 글로 고정한 한 형태이고, 공통 언어는 맥락 안에서 계속 정제된다.</a:t>
+              <a:t>"세션 02. 요구 분석과 유스케이스"의 용어집 노트에서 예고한 관계가 이것이다 — 용어집은 공통 언어를 글로 고정한 한 형태이고, 공통 언어는 맥락 안에서 계속 정제된다.</a:t>
             </a:r>
           </a:p>
         </p:txBody>
@@ -907,7 +907,7 @@
             <a:pPr lvl="0"/>
             <a:r>
               <a:rPr lang="ko-KR" sz="1200"/>
-              <a:t>사건(도메인 이벤트)은 "02. 요구 분석과 유스케이스"부터 이 과정의 출발점이었다. DDD의 도메인 이벤트와 같은 관점이다.</a:t>
+              <a:t>사건(도메인 이벤트)은 "세션 02. 요구 분석과 유스케이스"부터 이 과정의 출발점이었다. DDD의 도메인 이벤트와 같은 관점이다.</a:t>
             </a:r>
           </a:p>
         </p:txBody>
@@ -1104,7 +1104,7 @@
             <a:pPr lvl="0"/>
             <a:r>
               <a:rPr lang="ko-KR" sz="1200"/>
-              <a:t>원격 요청을 다시 보내려면 받는 쪽이 멱등해야 한다 — "12. 구현·검증·DevOps와 SW공학 피드백"의 중복 환불 통보와 같은 판단이다.</a:t>
+              <a:t>원격 요청을 다시 보내려면 받는 쪽이 멱등해야 한다 — "세션 12. 구현·검증·DevOps와 SW공학 피드백"의 중복 환불 통보와 같은 판단이다.</a:t>
             </a:r>
           </a:p>
           <a:p>
@@ -1179,7 +1179,7 @@
             <a:pPr lvl="0"/>
             <a:r>
               <a:rPr lang="ko-KR" sz="1200"/>
-              <a:t>표의 evidence는 차례로 "08. 변화 대응과 변이 설계", "10. 기술 제약과 도메인 의미 보존", "09. 설계 대안 평가"에서 나왔다.</a:t>
+              <a:t>표의 evidence는 차례로 "세션 08. 변화 대응과 변이 설계", "세션 10. 기술 제약과 도메인 의미 보존", "세션 09. 설계 대안 평가"에서 나왔다.</a:t>
             </a:r>
           </a:p>
           <a:p>
@@ -1505,7 +1505,7 @@
             <a:pPr lvl="0"/>
             <a:r>
               <a:rPr lang="ko-KR" sz="1200"/>
-              <a:t>하나의 전사 모델은 "10. 기술 제약과 도메인 의미 보존"의 외부 모델 닮기를 회사 규모로 한 것이다.</a:t>
+              <a:t>하나의 전사 모델은 "세션 10. 기술 제약과 도메인 의미 보존"의 외부 모델 닮기를 회사 규모로 한 것이다.</a:t>
             </a:r>
           </a:p>
           <a:p>
@@ -1763,7 +1763,7 @@
             <a:pPr lvl="0"/>
             <a:r>
               <a:rPr lang="ko-KR" sz="1200"/>
-              <a:t>재청구는 멱등해야 한다 — "12. 구현·검증·DevOps와 SW공학 피드백"의 판단이다.</a:t>
+              <a:t>재청구는 멱등해야 한다 — "세션 12. 구현·검증·DevOps와 SW공학 피드백"의 판단이다.</a:t>
             </a:r>
           </a:p>
         </p:txBody>
@@ -2136,7 +2136,7 @@
             <a:pPr lvl="0"/>
             <a:r>
               <a:rPr lang="ko-KR" sz="1200"/>
-              <a:t>설계와 아키텍처의 경계는 선이 아니라 폭이다. 이 과정의 원칙("01. OOAD 개요")처럼 판단의 수준이 다르다.</a:t>
+              <a:t>설계와 아키텍처의 경계는 선이 아니라 폭이다. 이 과정의 원칙("세션 01. OOAD 개요")처럼 판단의 수준이 다르다.</a:t>
             </a:r>
           </a:p>
         </p:txBody>
@@ -2204,7 +2204,7 @@
             <a:pPr lvl="0"/>
             <a:r>
               <a:rPr lang="ko-KR" sz="1200"/>
-              <a:t>표의 셋째 열은 "05. 구조적 경계와 의존성", "10. 기술 제약과 도메인 의미 보존", "09. 설계 대안 평가"의 결정이다.</a:t>
+              <a:t>표의 셋째 열은 "세션 05. 구조적 경계와 의존성", "세션 10. 기술 제약과 도메인 의미 보존", "세션 09. 설계 대안 평가"의 결정이다.</a:t>
             </a:r>
           </a:p>
         </p:txBody>
@@ -2272,7 +2272,7 @@
             <a:pPr lvl="0"/>
             <a:r>
               <a:rPr lang="ko-KR" sz="1200"/>
-              <a:t>품질 속성은 "02. 요구 분석과 유스케이스"의 비기능 요구다. 이 과정은 기능 요구를 중심으로 모델링했고, 품질 속성의 구조적 해결은 아키텍처의 몫이다.</a:t>
+              <a:t>품질 속성은 "세션 02. 요구 분석과 유스케이스"의 비기능 요구다. 이 과정은 기능 요구를 중심으로 모델링했고, 품질 속성의 구조적 해결은 아키텍처의 몫이다.</a:t>
             </a:r>
           </a:p>
         </p:txBody>
@@ -2340,7 +2340,7 @@
             <a:pPr lvl="0"/>
             <a:r>
               <a:rPr lang="ko-KR" sz="1200"/>
-              <a:t>수치는 교육용 가정이다. 실제 기준은 이해관계자와 정한다 — 요구 분석("02. 요구 분석과 유스케이스")의 일이다.</a:t>
+              <a:t>수치는 교육용 가정이다. 실제 기준은 이해관계자와 정한다 — 요구 분석("세션 02. 요구 분석과 유스케이스")의 일이다.</a:t>
             </a:r>
           </a:p>
         </p:txBody>
@@ -2401,7 +2401,7 @@
             <a:pPr lvl="0"/>
             <a:r>
               <a:rPr lang="ko-KR" sz="1200"/>
-              <a:t>어느 대안이 맞는지는 업무가 정한다. 선택과 포기한 대안은 결정 기록으로 남긴다("09. 설계 대안 평가").</a:t>
+              <a:t>어느 대안이 맞는지는 업무가 정한다. 선택과 포기한 대안은 결정 기록으로 남긴다("세션 09. 설계 대안 평가").</a:t>
             </a:r>
           </a:p>
           <a:p>
@@ -4494,7 +4494,7 @@
           </p:nvPr>
         </p:nvGraphicFramePr>
         <p:xfrm>
-          <a:off x="2360486" y="1842998"/>
+          <a:off x="2360486" y="1813560"/>
           <a:ext cx="4409440" cy="3873500"/>
         </p:xfrm>
         <a:graphic>
@@ -5240,7 +5240,7 @@
         </p:nvSpPr>
         <p:spPr>
           <a:xfrm>
-            <a:off x="365760" y="3384598"/>
+            <a:off x="365760" y="3482160"/>
             <a:ext cx="8412480" cy="781278"/>
           </a:xfrm>
           <a:prstGeom prst="rect">
@@ -5467,7 +5467,7 @@
           </p:nvPr>
         </p:nvGraphicFramePr>
         <p:xfrm>
-          <a:off x="2096326" y="2649162"/>
+          <a:off x="2096326" y="2600498"/>
           <a:ext cx="4937760" cy="3873500"/>
         </p:xfrm>
         <a:graphic>
@@ -6591,7 +6591,7 @@
         </p:nvSpPr>
         <p:spPr>
           <a:xfrm>
-            <a:off x="365760" y="4190762"/>
+            <a:off x="365760" y="4269098"/>
             <a:ext cx="8412480" cy="781278"/>
           </a:xfrm>
           <a:prstGeom prst="rect">
@@ -6654,7 +6654,7 @@
                 <a:latin typeface="맑은 고딕"/>
                 <a:ea typeface="맑은 고딕"/>
               </a:rPr>
-              <a:t>("05. 구조적 경계와 의존성")</a:t>
+              <a:t>("세션 05. 구조적 경계와 의존성")</a:t>
             </a:r>
             <a:r>
               <a:rPr sz="1800" b="0">
@@ -7042,7 +7042,7 @@
                 <a:latin typeface="맑은 고딕"/>
                 <a:ea typeface="맑은 고딕"/>
               </a:rPr>
-              <a:t> 외부 맥락의 모델이 주문 맥락에 새어 들어오지 않게 번역한다. "10. 기술 제약과 도메인 의미 보존"의 연동이 그것이다.</a:t>
+              <a:t> 외부 맥락의 모델이 주문 맥락에 새어 들어오지 않게 번역한다. "세션 10. 기술 제약과 도메인 의미 보존"의 연동이 그것이다.</a:t>
             </a:r>
           </a:p>
         </p:txBody>
@@ -7063,7 +7063,7 @@
         </p:blipFill>
         <p:spPr>
           <a:xfrm>
-            <a:off x="1934308" y="3787531"/>
+            <a:off x="1934308" y="2712720"/>
             <a:ext cx="5275385" cy="967154"/>
           </a:xfrm>
           <a:prstGeom prst="rect">
@@ -7240,7 +7240,7 @@
           </p:nvPr>
         </p:nvGraphicFramePr>
         <p:xfrm>
-          <a:off x="1620076" y="2649162"/>
+          <a:off x="1620076" y="2600498"/>
           <a:ext cx="5890260" cy="3873500"/>
         </p:xfrm>
         <a:graphic>
@@ -8129,7 +8129,7 @@
         </p:nvSpPr>
         <p:spPr>
           <a:xfrm>
-            <a:off x="365760" y="4190762"/>
+            <a:off x="365760" y="4269098"/>
             <a:ext cx="8412480" cy="524240"/>
           </a:xfrm>
           <a:prstGeom prst="rect">
@@ -8356,7 +8356,7 @@
           </p:nvPr>
         </p:nvGraphicFramePr>
         <p:xfrm>
-          <a:off x="1970596" y="2649162"/>
+          <a:off x="1970596" y="2600498"/>
           <a:ext cx="5189220" cy="3873500"/>
         </p:xfrm>
         <a:graphic>
@@ -9530,7 +9530,7 @@
         </p:nvSpPr>
         <p:spPr>
           <a:xfrm>
-            <a:off x="365760" y="4190762"/>
+            <a:off x="365760" y="4269098"/>
             <a:ext cx="8412480" cy="781278"/>
           </a:xfrm>
           <a:prstGeom prst="rect">
@@ -9563,7 +9563,7 @@
                 <a:latin typeface="맑은 고딕"/>
                 <a:ea typeface="맑은 고딕"/>
               </a:rPr>
-              <a:t>이 판단은 "11. 통합 설계와 적정 모델링"의 </a:t>
+              <a:t>이 판단은 "세션 11. 통합 설계와 적정 모델링"의 </a:t>
             </a:r>
             <a:r>
               <a:rPr sz="1800" b="1">
@@ -9767,7 +9767,7 @@
           </p:nvPr>
         </p:nvGraphicFramePr>
         <p:xfrm>
-          <a:off x="2011236" y="1842998"/>
+          <a:off x="2011236" y="1813560"/>
           <a:ext cx="5107940" cy="3873500"/>
         </p:xfrm>
         <a:graphic>
@@ -10737,7 +10737,7 @@
         </p:nvSpPr>
         <p:spPr>
           <a:xfrm>
-            <a:off x="365760" y="3960598"/>
+            <a:off x="365760" y="4058160"/>
             <a:ext cx="8412480" cy="781278"/>
           </a:xfrm>
           <a:prstGeom prst="rect">
@@ -10994,7 +10994,7 @@
           </p:nvPr>
         </p:nvGraphicFramePr>
         <p:xfrm>
-          <a:off x="2236026" y="3467009"/>
+          <a:off x="2236026" y="3311236"/>
           <a:ext cx="4658360" cy="3873500"/>
         </p:xfrm>
         <a:graphic>
@@ -11901,7 +11901,7 @@
         <p:spPr>
           <a:xfrm>
             <a:off x="365760" y="960120"/>
-            <a:ext cx="8412480" cy="2405289"/>
+            <a:ext cx="8412480" cy="2253403"/>
           </a:xfrm>
           <a:prstGeom prst="rect">
             <a:avLst/>
@@ -12343,7 +12343,7 @@
           </p:nvPr>
         </p:nvGraphicFramePr>
         <p:xfrm>
-          <a:off x="2670366" y="3209971"/>
+          <a:off x="2670366" y="3199015"/>
           <a:ext cx="3789680" cy="3873500"/>
         </p:xfrm>
         <a:graphic>
@@ -13399,7 +13399,7 @@
         </p:nvSpPr>
         <p:spPr>
           <a:xfrm>
-            <a:off x="365760" y="4463571"/>
+            <a:off x="365760" y="4579615"/>
             <a:ext cx="8412480" cy="781278"/>
           </a:xfrm>
           <a:prstGeom prst="rect">
@@ -13821,7 +13821,7 @@
         </p:blipFill>
         <p:spPr>
           <a:xfrm>
-            <a:off x="3305663" y="3434362"/>
+            <a:off x="3305663" y="2712720"/>
             <a:ext cx="2532673" cy="2413000"/>
           </a:xfrm>
           <a:prstGeom prst="rect">
@@ -13998,7 +13998,7 @@
           </p:nvPr>
         </p:nvGraphicFramePr>
         <p:xfrm>
-          <a:off x="1691196" y="3058085"/>
+          <a:off x="1691196" y="2874818"/>
           <a:ext cx="5748020" cy="3873500"/>
         </p:xfrm>
         <a:graphic>
@@ -14737,7 +14737,7 @@
         <p:spPr>
           <a:xfrm>
             <a:off x="365760" y="960120"/>
-            <a:ext cx="8412480" cy="1996365"/>
+            <a:ext cx="8412480" cy="1844479"/>
           </a:xfrm>
           <a:prstGeom prst="rect">
             <a:avLst/>
@@ -14974,7 +14974,7 @@
         </p:nvSpPr>
         <p:spPr>
           <a:xfrm>
-            <a:off x="365760" y="4311685"/>
+            <a:off x="365760" y="4255418"/>
             <a:ext cx="8412480" cy="781278"/>
           </a:xfrm>
           <a:prstGeom prst="rect">
@@ -15684,7 +15684,7 @@
           </p:nvPr>
         </p:nvGraphicFramePr>
         <p:xfrm>
-          <a:off x="1885506" y="3058085"/>
+          <a:off x="1885506" y="2874818"/>
           <a:ext cx="5359400" cy="3873500"/>
         </p:xfrm>
         <a:graphic>
@@ -16072,7 +16072,7 @@
         <p:spPr>
           <a:xfrm>
             <a:off x="365760" y="960120"/>
-            <a:ext cx="8412480" cy="1996365"/>
+            <a:ext cx="8412480" cy="1844479"/>
           </a:xfrm>
           <a:prstGeom prst="rect">
             <a:avLst/>
@@ -16309,7 +16309,7 @@
         </p:nvSpPr>
         <p:spPr>
           <a:xfrm>
-            <a:off x="365760" y="4023685"/>
+            <a:off x="365760" y="3967418"/>
             <a:ext cx="8412480" cy="781278"/>
           </a:xfrm>
           <a:prstGeom prst="rect">
@@ -16536,7 +16536,7 @@
           </p:nvPr>
         </p:nvGraphicFramePr>
         <p:xfrm>
-          <a:off x="2318576" y="2100036"/>
+          <a:off x="2318576" y="2087880"/>
           <a:ext cx="4493260" cy="3873500"/>
         </p:xfrm>
         <a:graphic>
@@ -17394,7 +17394,7 @@
         </p:nvSpPr>
         <p:spPr>
           <a:xfrm>
-            <a:off x="365760" y="3929636"/>
+            <a:off x="365760" y="4044480"/>
             <a:ext cx="8412480" cy="781278"/>
           </a:xfrm>
           <a:prstGeom prst="rect">
@@ -20320,7 +20320,7 @@
           </p:nvPr>
         </p:nvGraphicFramePr>
         <p:xfrm>
-          <a:off x="2444306" y="1842998"/>
+          <a:off x="2444306" y="1813560"/>
           <a:ext cx="4241800" cy="3873500"/>
         </p:xfrm>
         <a:graphic>
@@ -21467,7 +21467,7 @@
           </p:nvPr>
         </p:nvGraphicFramePr>
         <p:xfrm>
-          <a:off x="2279206" y="1842998"/>
+          <a:off x="2279206" y="1813560"/>
           <a:ext cx="4572000" cy="3873500"/>
         </p:xfrm>
         <a:graphic>
@@ -23257,7 +23257,7 @@
           </p:nvPr>
         </p:nvGraphicFramePr>
         <p:xfrm>
-          <a:off x="1202246" y="2649162"/>
+          <a:off x="1202246" y="2600498"/>
           <a:ext cx="6725920" cy="3873500"/>
         </p:xfrm>
         <a:graphic>
@@ -24253,7 +24253,7 @@
         </p:nvSpPr>
         <p:spPr>
           <a:xfrm>
-            <a:off x="365760" y="3902762"/>
+            <a:off x="365760" y="3981098"/>
             <a:ext cx="8412480" cy="781278"/>
           </a:xfrm>
           <a:prstGeom prst="rect">
@@ -25150,7 +25150,7 @@
           </p:nvPr>
         </p:nvGraphicFramePr>
         <p:xfrm>
-          <a:off x="1832166" y="2100036"/>
+          <a:off x="1832166" y="2087880"/>
           <a:ext cx="5466080" cy="3873500"/>
         </p:xfrm>
         <a:graphic>
@@ -26730,7 +26730,7 @@
         </p:nvSpPr>
         <p:spPr>
           <a:xfrm>
-            <a:off x="365760" y="3929636"/>
+            <a:off x="365760" y="4044480"/>
             <a:ext cx="8412480" cy="781278"/>
           </a:xfrm>
           <a:prstGeom prst="rect">
@@ -26957,7 +26957,7 @@
           </p:nvPr>
         </p:nvGraphicFramePr>
         <p:xfrm>
-          <a:off x="2097596" y="2100036"/>
+          <a:off x="2097596" y="2087880"/>
           <a:ext cx="4935220" cy="3873500"/>
         </p:xfrm>
         <a:graphic>
@@ -28008,7 +28008,7 @@
         </p:nvSpPr>
         <p:spPr>
           <a:xfrm>
-            <a:off x="365760" y="3641636"/>
+            <a:off x="365760" y="3756480"/>
             <a:ext cx="8412480" cy="1038316"/>
           </a:xfrm>
           <a:prstGeom prst="rect">
@@ -28061,7 +28061,7 @@
                 <a:latin typeface="맑은 고딕"/>
                 <a:ea typeface="맑은 고딕"/>
               </a:rPr>
-              <a:t>. 이 과정은 그 결정을 "05. 구조적 경계와 의존성"에서 내렸다 —</a:t>
+              <a:t>. 이 과정은 그 결정을 "세션 05. 구조적 경계와 의존성"에서 내렸다 —</a:t>
             </a:r>
             <a:r>
               <a:rPr sz="1600" b="0">
@@ -28245,7 +28245,7 @@
           </p:nvPr>
         </p:nvGraphicFramePr>
         <p:xfrm>
-          <a:off x="2180146" y="2801048"/>
+          <a:off x="2180146" y="2600498"/>
           <a:ext cx="4770120" cy="3873500"/>
         </p:xfrm>
         <a:graphic>
@@ -29152,7 +29152,7 @@
         <p:spPr>
           <a:xfrm>
             <a:off x="365760" y="960120"/>
-            <a:ext cx="8412480" cy="1739328"/>
+            <a:ext cx="8412480" cy="1587442"/>
           </a:xfrm>
           <a:prstGeom prst="rect">
             <a:avLst/>
@@ -29389,7 +29389,7 @@
         </p:nvSpPr>
         <p:spPr>
           <a:xfrm>
-            <a:off x="365760" y="4342648"/>
+            <a:off x="365760" y="4269098"/>
             <a:ext cx="8412480" cy="781278"/>
           </a:xfrm>
           <a:prstGeom prst="rect">
@@ -29616,7 +29616,7 @@
           </p:nvPr>
         </p:nvGraphicFramePr>
         <p:xfrm>
-          <a:off x="1565466" y="2649162"/>
+          <a:off x="1565466" y="2600498"/>
           <a:ext cx="5999480" cy="3873500"/>
         </p:xfrm>
         <a:graphic>
@@ -30757,7 +30757,7 @@
           </p:nvPr>
         </p:nvGraphicFramePr>
         <p:xfrm>
-          <a:off x="2039175" y="2100036"/>
+          <a:off x="2039175" y="2087880"/>
           <a:ext cx="5052060" cy="3873500"/>
         </p:xfrm>
         <a:graphic>
@@ -31727,7 +31727,7 @@
         </p:nvSpPr>
         <p:spPr>
           <a:xfrm>
-            <a:off x="365760" y="4217636"/>
+            <a:off x="365760" y="4332480"/>
             <a:ext cx="8412480" cy="781278"/>
           </a:xfrm>
           <a:prstGeom prst="rect">
@@ -31954,7 +31954,7 @@
           </p:nvPr>
         </p:nvGraphicFramePr>
         <p:xfrm>
-          <a:off x="1663256" y="2100036"/>
+          <a:off x="1663256" y="2087880"/>
           <a:ext cx="5803900" cy="3873500"/>
         </p:xfrm>
         <a:graphic>
@@ -32911,7 +32911,7 @@
                 <a:latin typeface="맑은 고딕"/>
                 <a:ea typeface="맑은 고딕"/>
               </a:rPr>
-              <a:t>한다. O-1의 취소에서 가용성을 높이면 "취소됨"을 확정하는 시점이 늦어진다. 표는 두 대안의 절충이며, "09. 설계 대안 평가"의 흐름을 </a:t>
+              <a:t>한다. O-1의 취소에서 가용성을 높이면 "취소됨"을 확정하는 시점이 늦어진다. 표는 두 대안의 절충이며, "세션 09. 설계 대안 평가"의 흐름을 </a:t>
             </a:r>
             <a:r>
               <a:rPr sz="1800" b="1">
@@ -33015,7 +33015,7 @@
         </p:nvSpPr>
         <p:spPr>
           <a:xfrm>
-            <a:off x="365760" y="3641636"/>
+            <a:off x="365760" y="3756480"/>
             <a:ext cx="8412480" cy="781278"/>
           </a:xfrm>
           <a:prstGeom prst="rect">

--- a/courses/ooad/sessions/s13.pptx
+++ b/courses/ooad/sessions/s13.pptx
@@ -6424,7 +6424,47 @@
                 <a:latin typeface="맑은 고딕"/>
                 <a:ea typeface="맑은 고딕"/>
               </a:rPr>
-              <a:t>이 다르면 뜻이 다르다. "주문"은 주문 시스템에서는 O-1의 상태를 가진 약속이지만, 배송 시스템과 회계 시스템에서는 다른 것이다. 표의 가운데 열이 각 맥락에서의 뜻이다.</a:t>
+              <a:t>이 다르면 뜻이 다르다. "주문"은 주문 시스템에서는 O-1의 상태를 가진 약속이지만, 배송 시스템에서는 </a:t>
+            </a:r>
+            <a:r>
+              <a:rPr sz="1800" b="1">
+                <a:solidFill>
+                  <a:srgbClr val="000000"/>
+                </a:solidFill>
+                <a:latin typeface="맑은 고딕"/>
+                <a:ea typeface="맑은 고딕"/>
+              </a:rPr>
+              <a:t>출고할 물건 한 건</a:t>
+            </a:r>
+            <a:r>
+              <a:rPr sz="1800" b="0">
+                <a:solidFill>
+                  <a:srgbClr val="000000"/>
+                </a:solidFill>
+                <a:latin typeface="맑은 고딕"/>
+                <a:ea typeface="맑은 고딕"/>
+              </a:rPr>
+              <a:t>이고 회계 시스템에서는 </a:t>
+            </a:r>
+            <a:r>
+              <a:rPr sz="1800" b="1">
+                <a:solidFill>
+                  <a:srgbClr val="000000"/>
+                </a:solidFill>
+                <a:latin typeface="맑은 고딕"/>
+                <a:ea typeface="맑은 고딕"/>
+              </a:rPr>
+              <a:t>입금 한 건</a:t>
+            </a:r>
+            <a:r>
+              <a:rPr sz="1800" b="0">
+                <a:solidFill>
+                  <a:srgbClr val="000000"/>
+                </a:solidFill>
+                <a:latin typeface="맑은 고딕"/>
+                <a:ea typeface="맑은 고딕"/>
+              </a:rPr>
+              <a:t>이다.</a:t>
             </a:r>
           </a:p>
           <a:p>
@@ -22404,7 +22444,7 @@
                 <a:latin typeface="맑은 고딕"/>
                 <a:ea typeface="맑은 고딕"/>
               </a:rPr>
-              <a:t>"회차"는 맥락마다 뜻이 다르다. 표의 가운데 열이 각 맥락에서의 뜻이고, 정기배송 맥락만 </a:t>
+              <a:t>"회차"는 정기배송에서는 예정일과 상태를 가진 </a:t>
             </a:r>
             <a:r>
               <a:rPr sz="1800" b="1">
@@ -22414,6 +22454,46 @@
                 <a:latin typeface="맑은 고딕"/>
                 <a:ea typeface="맑은 고딕"/>
               </a:rPr>
+              <a:t>배송 회차</a:t>
+            </a:r>
+            <a:r>
+              <a:rPr sz="1800" b="0">
+                <a:solidFill>
+                  <a:srgbClr val="000000"/>
+                </a:solidFill>
+                <a:latin typeface="맑은 고딕"/>
+                <a:ea typeface="맑은 고딕"/>
+              </a:rPr>
+              <a:t>이지만 결제에서는 </a:t>
+            </a:r>
+            <a:r>
+              <a:rPr sz="1800" b="1">
+                <a:solidFill>
+                  <a:srgbClr val="000000"/>
+                </a:solidFill>
+                <a:latin typeface="맑은 고딕"/>
+                <a:ea typeface="맑은 고딕"/>
+              </a:rPr>
+              <a:t>청구 한 건</a:t>
+            </a:r>
+            <a:r>
+              <a:rPr sz="1800" b="0">
+                <a:solidFill>
+                  <a:srgbClr val="000000"/>
+                </a:solidFill>
+                <a:latin typeface="맑은 고딕"/>
+                <a:ea typeface="맑은 고딕"/>
+              </a:rPr>
+              <a:t>이다. </a:t>
+            </a:r>
+            <a:r>
+              <a:rPr sz="1800" b="1">
+                <a:solidFill>
+                  <a:srgbClr val="000000"/>
+                </a:solidFill>
+                <a:latin typeface="맑은 고딕"/>
+                <a:ea typeface="맑은 고딕"/>
+              </a:rPr>
               <a:t>우리 용어집</a:t>
             </a:r>
             <a:r>
@@ -22424,7 +22504,7 @@
                 <a:latin typeface="맑은 고딕"/>
                 <a:ea typeface="맑은 고딕"/>
               </a:rPr>
-              <a:t>을 쓴다.</a:t>
+              <a:t>은 정기배송 맥락에서만 통한다.</a:t>
             </a:r>
           </a:p>
         </p:txBody>
@@ -23257,7 +23337,7 @@
           </p:nvPr>
         </p:nvGraphicFramePr>
         <p:xfrm>
-          <a:off x="1202246" y="2600498"/>
+          <a:off x="1202246" y="2326178"/>
           <a:ext cx="6725920" cy="3873500"/>
         </p:xfrm>
         <a:graphic>
@@ -23996,7 +24076,7 @@
         <p:spPr>
           <a:xfrm>
             <a:off x="365760" y="960120"/>
-            <a:ext cx="8412480" cy="1587442"/>
+            <a:ext cx="8412480" cy="1330404"/>
           </a:xfrm>
           <a:prstGeom prst="rect">
             <a:avLst/>
@@ -24066,7 +24146,7 @@
                 <a:latin typeface="맑은 고딕"/>
                 <a:ea typeface="맑은 고딕"/>
               </a:rPr>
-              <a:t>을 준다. 아래 표의 가운데 열이 이 과정이 준 것, 오른쪽 열이 각 영역이 </a:t>
+              <a:t>을 주고, 각 영역은 그 위에 자기 판단을 </a:t>
             </a:r>
             <a:r>
               <a:rPr sz="1800" b="1">
@@ -24076,7 +24156,7 @@
                 <a:latin typeface="맑은 고딕"/>
                 <a:ea typeface="맑은 고딕"/>
               </a:rPr>
-              <a:t>더</a:t>
+              <a:t>더 소유한다</a:t>
             </a:r>
             <a:r>
               <a:rPr sz="1800" b="0">
@@ -24086,7 +24166,7 @@
                 <a:latin typeface="맑은 고딕"/>
                 <a:ea typeface="맑은 고딕"/>
               </a:rPr>
-              <a:t> 소유하는 판단이다.</a:t>
+              <a:t>.</a:t>
             </a:r>
           </a:p>
           <a:p>
@@ -24253,7 +24333,7 @@
         </p:nvSpPr>
         <p:spPr>
           <a:xfrm>
-            <a:off x="365760" y="3981098"/>
+            <a:off x="365760" y="3706778"/>
             <a:ext cx="8412480" cy="781278"/>
           </a:xfrm>
           <a:prstGeom prst="rect">
@@ -27924,7 +28004,27 @@
                 <a:latin typeface="맑은 고딕"/>
                 <a:ea typeface="맑은 고딕"/>
               </a:rPr>
-              <a:t>이다. 주문 사례의 결정 가운데 어떤 것은 한 클래스의 일이고, 어떤 것은 시스템 전체의 일이다. 표의 오른쪽 열이 그 구분이다.</a:t>
+              <a:t>이다. 주문 사례의 결정도 한 클래스에 머무는 것과 모든 패키지에 걸치는 것으로 갈리며, </a:t>
+            </a:r>
+            <a:r>
+              <a:rPr sz="1800" b="1">
+                <a:solidFill>
+                  <a:srgbClr val="000000"/>
+                </a:solidFill>
+                <a:latin typeface="맑은 고딕"/>
+                <a:ea typeface="맑은 고딕"/>
+              </a:rPr>
+              <a:t>영향 범위</a:t>
+            </a:r>
+            <a:r>
+              <a:rPr sz="1800" b="0">
+                <a:solidFill>
+                  <a:srgbClr val="000000"/>
+                </a:solidFill>
+                <a:latin typeface="맑은 고딕"/>
+                <a:ea typeface="맑은 고딕"/>
+              </a:rPr>
+              <a:t>가 그 둘을 가른다.</a:t>
             </a:r>
           </a:p>
         </p:txBody>
